--- a/deliverables/review3_changes.pptx
+++ b/deliverables/review3_changes.pptx
@@ -17,9 +17,11 @@
     <p:sldId id="265" r:id="rId11"/>
     <p:sldId id="266" r:id="rId12"/>
     <p:sldId id="267" r:id="rId13"/>
+    <p:sldId id="268" r:id="rId14"/>
+    <p:sldId id="269" r:id="rId15"/>
   </p:sldIdLst>
   <p:notesMasterIdLst>
-    <p:notesMasterId r:id="rId14"/>
+    <p:notesMasterId r:id="rId16"/>
   </p:notesMasterIdLst>
   <p:sldSz cx="12192000" cy="6858000"/>
   <p:notesSz cx="6858000" cy="12192000"/>
@@ -118,19 +120,19 @@
   <p:extLst>
     <p:ext uri="{521415D9-36F7-43E2-AB2F-B90AF26B5E84}">
       <p14:sectionLst xmlns:p14="http://schemas.microsoft.com/office/powerpoint/2010/main">
-        <p14:section name="Opening" id="{f82eaf78-b95d-96ff-432e-a4fc1e4d71f4}">
+        <p14:section name="Opening" id="{05b8fad7-a341-303e-058e-6843178fd647}">
           <p14:sldIdLst>
             <p14:sldId id="256"/>
           </p14:sldIdLst>
         </p14:section>
-        <p14:section name="What we added" id="{cd6be5d1-ab66-ee0d-d153-06ec52517aed}">
+        <p14:section name="What we added" id="{580237b9-4be9-0c85-c185-5d945580eb96}">
           <p14:sldIdLst>
             <p14:sldId id="257"/>
             <p14:sldId id="258"/>
             <p14:sldId id="259"/>
           </p14:sldIdLst>
         </p14:section>
-        <p14:section name="The demo" id="{3cb1c43a-0ae7-9be8-f760-ddf6ef4ee5c3}">
+        <p14:section name="The demo" id="{0d61c4a9-7b54-7efd-3b03-ed089c7d9ee2}">
           <p14:sldIdLst>
             <p14:sldId id="260"/>
             <p14:sldId id="261"/>
@@ -138,12 +140,14 @@
             <p14:sldId id="263"/>
             <p14:sldId id="264"/>
             <p14:sldId id="265"/>
+            <p14:sldId id="266"/>
+            <p14:sldId id="267"/>
           </p14:sldIdLst>
         </p14:section>
-        <p14:section name="Changes and next" id="{da23c5f3-cbdc-9c3e-021e-eca1a1cc3bd2}">
+        <p14:section name="Changes and next" id="{1cff947c-c767-cd7d-cc4f-f3be857eabea}">
           <p14:sldIdLst>
-            <p14:sldId id="266"/>
-            <p14:sldId id="267"/>
+            <p14:sldId id="268"/>
+            <p14:sldId id="269"/>
           </p14:sldIdLst>
         </p14:section>
       </p14:sectionLst>
@@ -243,9 +247,9 @@
           </c:dLbls>
           <c:cat>
             <c:multiLvlStrRef>
-              <c:f>Sheet1!$A$2:$A$5</c:f>
+              <c:f>Sheet1!$A$2:$A$6</c:f>
               <c:multiLvlStrCache>
-                <c:ptCount val="4"/>
+                <c:ptCount val="5"/>
                 <c:lvl>
                   <c:pt idx="0">
                     <c:v>Both on</c:v>
@@ -259,16 +263,19 @@
                   <c:pt idx="3">
                     <c:v>Both off</c:v>
                   </c:pt>
+                  <c:pt idx="4">
+                    <c:v>Inside a VM</c:v>
+                  </c:pt>
                 </c:lvl>
               </c:multiLvlStrCache>
             </c:multiLvlStrRef>
           </c:cat>
           <c:val>
             <c:numRef>
-              <c:f>Sheet1!$B$2:$B$5</c:f>
+              <c:f>Sheet1!$B$2:$B$6</c:f>
               <c:numCache>
                 <c:formatCode>General</c:formatCode>
-                <c:ptCount val="4"/>
+                <c:ptCount val="5"/>
                 <c:pt idx="0">
                   <c:v>201</c:v>
                 </c:pt>
@@ -280,6 +287,9 @@
                 </c:pt>
                 <c:pt idx="3">
                   <c:v>1273</c:v>
+                </c:pt>
+                <c:pt idx="4">
+                  <c:v>1525</c:v>
                 </c:pt>
               </c:numCache>
             </c:numRef>
@@ -902,7 +912,7 @@
           <a:p>
             <a:r>
               <a:rPr lang="en-US" dirty="0"/>
-              <a:t>The demo hides the detail, but it is all there: each entry the CPU read, its address, its 64-bit value and the flag bits that decided the outcome.</a:t>
+              <a:t>The same switches are on the page, so this can be shown live. With the walk cache off, every TLB miss reads all four levels; with large pages off, the buffer needs 4 KB pages and an extra level. Inside a VM, with both caches on, the same work needs 7.6 times the reads.</a:t>
             </a:r>
             <a:endParaRPr lang="en-US" dirty="0"/>
           </a:p>
@@ -990,7 +1000,7 @@
           <a:p>
             <a:r>
               <a:rPr lang="en-US" dirty="0"/>
-              <a:t>Everything runs in plain Python inside Streamlit, so deployment is still just pushing the repository.</a:t>
+              <a:t>This answers 'modelled, not measured'. The page runs a pointer chase in the viewer's browser: the same reads, packed into a few pages or spread one per page. Once the pages outgrow the TLB, every spread read also pays a page walk. Nothing is sent to the server.</a:t>
             </a:r>
             <a:endParaRPr lang="en-US" dirty="0"/>
           </a:p>
@@ -1078,7 +1088,7 @@
           <a:p>
             <a:r>
               <a:rPr lang="en-US" dirty="0"/>
-              <a:t>Run these in order on the live site. Reset first if anything is already on screen.</a:t>
+              <a:t>The demo hides the detail, but it is all there: each entry the CPU read, its address, its 64-bit value and the flag bits that decided the outcome.</a:t>
             </a:r>
             <a:endParaRPr lang="en-US" dirty="0"/>
           </a:p>
@@ -1102,6 +1112,182 @@
             <a:fld id="{F7021451-1387-4CA6-816F-3879F97B5CBC}" type="slidenum">
               <a:rPr lang="en-US"/>
               <a:t>12</a:t>
+            </a:fld>
+            <a:endParaRPr lang="en-US"/>
+          </a:p>
+        </p:txBody>
+      </p:sp>
+    </p:spTree>
+    <p:extLst>
+      <p:ext uri="{BB962C8B-B14F-4D97-AF65-F5344CB8AC3E}">
+        <p14:creationId xmlns:p14="http://schemas.microsoft.com/office/powerpoint/2010/main" val="1024086991"/>
+      </p:ext>
+    </p:extLst>
+  </p:cSld>
+  <p:clrMapOvr>
+    <a:masterClrMapping/>
+  </p:clrMapOvr>
+</p:notes>
+</file>
+
+<file path=ppt/notesSlides/notesSlide13.xml><?xml version="1.0" encoding="utf-8"?>
+<p:notes xmlns:a="http://schemas.openxmlformats.org/drawingml/2006/main" xmlns:r="http://schemas.openxmlformats.org/officeDocument/2006/relationships" xmlns:p="http://schemas.openxmlformats.org/presentationml/2006/main">
+  <p:cSld>
+    <p:spTree>
+      <p:nvGrpSpPr>
+        <p:cNvPr id="1" name=""/>
+        <p:cNvGrpSpPr/>
+        <p:nvPr/>
+      </p:nvGrpSpPr>
+      <p:grpSpPr>
+        <a:xfrm>
+          <a:off x="0" y="0"/>
+          <a:ext cx="0" cy="0"/>
+          <a:chOff x="0" y="0"/>
+          <a:chExt cx="0" cy="0"/>
+        </a:xfrm>
+      </p:grpSpPr>
+      <p:sp>
+        <p:nvSpPr>
+          <p:cNvPr id="2" name="Slide Image Placeholder 1"/>
+          <p:cNvSpPr>
+            <a:spLocks noGrp="1" noRot="1" noChangeAspect="1"/>
+          </p:cNvSpPr>
+          <p:nvPr>
+            <p:ph type="sldImg"/>
+          </p:nvPr>
+        </p:nvSpPr>
+        <p:spPr/>
+      </p:sp>
+      <p:sp>
+        <p:nvSpPr>
+          <p:cNvPr id="3" name="Notes Placeholder 2"/>
+          <p:cNvSpPr>
+            <a:spLocks noGrp="1"/>
+          </p:cNvSpPr>
+          <p:nvPr>
+            <p:ph type="body" idx="1"/>
+          </p:nvPr>
+        </p:nvSpPr>
+        <p:spPr/>
+        <p:txBody>
+          <a:bodyPr/>
+          <a:lstStyle/>
+          <a:p>
+            <a:r>
+              <a:rPr lang="en-US" dirty="0"/>
+              <a:t>Everything runs in plain Python inside Streamlit, so deployment is still just pushing the repository.</a:t>
+            </a:r>
+            <a:endParaRPr lang="en-US" dirty="0"/>
+          </a:p>
+        </p:txBody>
+      </p:sp>
+      <p:sp>
+        <p:nvSpPr>
+          <p:cNvPr id="4" name="Slide Number Placeholder 3"/>
+          <p:cNvSpPr>
+            <a:spLocks noGrp="1"/>
+          </p:cNvSpPr>
+          <p:nvPr>
+            <p:ph type="sldNum" sz="quarter" idx="10"/>
+          </p:nvPr>
+        </p:nvSpPr>
+        <p:spPr/>
+        <p:txBody>
+          <a:bodyPr/>
+          <a:lstStyle/>
+          <a:p>
+            <a:fld id="{F7021451-1387-4CA6-816F-3879F97B5CBC}" type="slidenum">
+              <a:rPr lang="en-US"/>
+              <a:t>13</a:t>
+            </a:fld>
+            <a:endParaRPr lang="en-US"/>
+          </a:p>
+        </p:txBody>
+      </p:sp>
+    </p:spTree>
+    <p:extLst>
+      <p:ext uri="{BB962C8B-B14F-4D97-AF65-F5344CB8AC3E}">
+        <p14:creationId xmlns:p14="http://schemas.microsoft.com/office/powerpoint/2010/main" val="1024086991"/>
+      </p:ext>
+    </p:extLst>
+  </p:cSld>
+  <p:clrMapOvr>
+    <a:masterClrMapping/>
+  </p:clrMapOvr>
+</p:notes>
+</file>
+
+<file path=ppt/notesSlides/notesSlide14.xml><?xml version="1.0" encoding="utf-8"?>
+<p:notes xmlns:a="http://schemas.openxmlformats.org/drawingml/2006/main" xmlns:r="http://schemas.openxmlformats.org/officeDocument/2006/relationships" xmlns:p="http://schemas.openxmlformats.org/presentationml/2006/main">
+  <p:cSld>
+    <p:spTree>
+      <p:nvGrpSpPr>
+        <p:cNvPr id="1" name=""/>
+        <p:cNvGrpSpPr/>
+        <p:nvPr/>
+      </p:nvGrpSpPr>
+      <p:grpSpPr>
+        <a:xfrm>
+          <a:off x="0" y="0"/>
+          <a:ext cx="0" cy="0"/>
+          <a:chOff x="0" y="0"/>
+          <a:chExt cx="0" cy="0"/>
+        </a:xfrm>
+      </p:grpSpPr>
+      <p:sp>
+        <p:nvSpPr>
+          <p:cNvPr id="2" name="Slide Image Placeholder 1"/>
+          <p:cNvSpPr>
+            <a:spLocks noGrp="1" noRot="1" noChangeAspect="1"/>
+          </p:cNvSpPr>
+          <p:nvPr>
+            <p:ph type="sldImg"/>
+          </p:nvPr>
+        </p:nvSpPr>
+        <p:spPr/>
+      </p:sp>
+      <p:sp>
+        <p:nvSpPr>
+          <p:cNvPr id="3" name="Notes Placeholder 2"/>
+          <p:cNvSpPr>
+            <a:spLocks noGrp="1"/>
+          </p:cNvSpPr>
+          <p:nvPr>
+            <p:ph type="body" idx="1"/>
+          </p:nvPr>
+        </p:nvSpPr>
+        <p:spPr/>
+        <p:txBody>
+          <a:bodyPr/>
+          <a:lstStyle/>
+          <a:p>
+            <a:r>
+              <a:rPr lang="en-US" dirty="0"/>
+              <a:t>Run these in order on the live site. Reset first if anything is already on screen.</a:t>
+            </a:r>
+            <a:endParaRPr lang="en-US" dirty="0"/>
+          </a:p>
+        </p:txBody>
+      </p:sp>
+      <p:sp>
+        <p:nvSpPr>
+          <p:cNvPr id="4" name="Slide Number Placeholder 3"/>
+          <p:cNvSpPr>
+            <a:spLocks noGrp="1"/>
+          </p:cNvSpPr>
+          <p:nvPr>
+            <p:ph type="sldNum" sz="quarter" idx="10"/>
+          </p:nvPr>
+        </p:nvSpPr>
+        <p:spPr/>
+        <p:txBody>
+          <a:bodyPr/>
+          <a:lstStyle/>
+          <a:p>
+            <a:fld id="{F7021451-1387-4CA6-816F-3879F97B5CBC}" type="slidenum">
+              <a:rPr lang="en-US"/>
+              <a:t>14</a:t>
             </a:fld>
             <a:endParaRPr lang="en-US"/>
           </a:p>
@@ -1694,7 +1880,7 @@
           <a:p>
             <a:r>
               <a:rPr lang="en-US" dirty="0"/>
-              <a:t>The tree grows as you click. Orange is the latest walk, blue the levels the walk cache skipped. Only tables with a used entry exist, which is why a four-level tree beats a flat table.</a:t>
+              <a:t>Turn on 'Inside a virtual machine' in Hardware. Windows is now a guest: every table address its walk uses is a guest-physical address, which the host must translate with its own four-level walk first. Four guest levels times five reads, plus four for the final page, gives 24.</a:t>
             </a:r>
             <a:endParaRPr lang="en-US" dirty="0"/>
           </a:p>
@@ -1782,7 +1968,7 @@
           <a:p>
             <a:r>
               <a:rPr lang="en-US" dirty="0"/>
-              <a:t>The same switches are on the page, so this can be shown live. With the walk cache off, every TLB miss reads all four levels; with large pages off, the buffer needs 4 KB pages and an extra level.</a:t>
+              <a:t>The tree grows as you click. Orange is the latest walk, blue the levels the walk cache skipped. Only tables with a used entry exist, which is why a four-level tree beats a flat table.</a:t>
             </a:r>
             <a:endParaRPr lang="en-US" dirty="0"/>
           </a:p>
@@ -2906,7 +3092,7 @@
                   <a:schemeClr val="accent1"/>
                 </a:solidFill>
               </a:rPr>
-              <a:t>FOR QUESTIONS</a:t>
+              <a:t>HARDWARE SWITCHES</a:t>
             </a:r>
             <a:endParaRPr lang="en-US" sz="1300" dirty="0"/>
           </a:p>
@@ -2947,15 +3133,247 @@
                 <a:ea typeface="Cambria" pitchFamily="34" charset="-122"/>
                 <a:cs typeface="Cambria" pitchFamily="34" charset="-120"/>
               </a:rPr>
-              <a:t>The real entry bits are one click away</a:t>
+              <a:t>Caches cut page-table reads; a VM multiplies them</a:t>
             </a:r>
             <a:endParaRPr lang="en-US" sz="3200" dirty="0"/>
           </a:p>
         </p:txBody>
       </p:sp>
+      <p:graphicFrame>
+        <p:nvGraphicFramePr>
+          <p:cNvPr id="4" name="Reads chart" descr=""/>
+          <p:cNvGraphicFramePr/>
+          <p:nvPr/>
+        </p:nvGraphicFramePr>
+        <p:xfrm>
+          <a:off x="548640" y="1645920"/>
+          <a:ext cx="7863840" cy="4480560"/>
+        </p:xfrm>
+        <a:graphic xmlns:a="http://schemas.openxmlformats.org/drawingml/2006/main">
+          <a:graphicData uri="http://schemas.openxmlformats.org/drawingml/2006/chart">
+            <c:chart xmlns:c="http://schemas.openxmlformats.org/drawingml/2006/chart" r:id="rId1"/>
+          </a:graphicData>
+        </a:graphic>
+      </p:graphicFrame>
       <p:pic>
         <p:nvPicPr>
-          <p:cNvPr id="4" name="entries.png" descr="Expanded section with each entry read and its flag bits">    </p:cNvPr>
+          <p:cNvPr id="5" name="Hardware menu" descr="The Hardware menu with the switches">    </p:cNvPr>
+          <p:cNvPicPr>
+            <a:picLocks noChangeAspect="1"/>
+          </p:cNvPicPr>
+          <p:nvPr/>
+        </p:nvPicPr>
+        <p:blipFill>
+          <a:blip r:embed="rId2"/>
+          <a:stretch>
+            <a:fillRect/>
+          </a:stretch>
+        </p:blipFill>
+        <p:spPr>
+          <a:xfrm>
+            <a:off x="9052560" y="1737360"/>
+            <a:ext cx="1917303" cy="2423160"/>
+          </a:xfrm>
+          <a:prstGeom prst="rect">
+            <a:avLst/>
+          </a:prstGeom>
+          <a:effectLst>
+            <a:outerShdw sx="100000" sy="100000" kx="0" ky="0" algn="bl" rotWithShape="0" blurRad="76200" dist="25400" dir="5400000">
+              <a:srgbClr val="9AA3AE">
+                <a:alpha val="35000"/>
+              </a:srgbClr>
+            </a:outerShdw>
+          </a:effectLst>
+        </p:spPr>
+      </p:pic>
+      <p:sp>
+        <p:nvSpPr>
+          <p:cNvPr id="6" name="Chart note"/>
+          <p:cNvSpPr txBox="1"/>
+          <p:nvPr/>
+        </p:nvSpPr>
+        <p:spPr>
+          <a:xfrm>
+            <a:off x="8915400" y="4434840"/>
+            <a:ext cx="2697480" cy="1463040"/>
+          </a:xfrm>
+          <a:prstGeom prst="rect">
+            <a:avLst/>
+          </a:prstGeom>
+          <a:noFill/>
+          <a:ln/>
+        </p:spPr>
+        <p:txBody>
+          <a:bodyPr wrap="square" lIns="0" tIns="0" rIns="0" bIns="0" rtlCol="0" anchor="t"/>
+          <a:lstStyle/>
+          <a:p>
+            <a:pPr indent="0" marL="0">
+              <a:buNone/>
+            </a:pPr>
+            <a:r>
+              <a:rPr lang="en-US" sz="1300" dirty="0">
+                <a:solidFill>
+                  <a:schemeClr val="tx2"/>
+                </a:solidFill>
+              </a:rPr>
+              <a:t>192 accesses: 64 heap pages written twice, plus 64 touches of the 4 MB buffer. Model output, not a hardware measurement.</a:t>
+            </a:r>
+            <a:endParaRPr lang="en-US" sz="1300" dirty="0"/>
+          </a:p>
+        </p:txBody>
+      </p:sp>
+      <p:sp>
+        <p:nvSpPr>
+          <p:cNvPr id="25" name="Slide Number Placeholder 0"/>
+          <p:cNvSpPr>
+            <a:spLocks noGrp="1"/>
+          </p:cNvSpPr>
+          <p:nvPr>
+            <p:ph type="sldNum" sz="quarter" idx="4294967295"/>
+          </p:nvPr>
+        </p:nvSpPr>
+        <p:spPr>
+          <a:xfrm>
+            <a:off x="11247120" y="6400800"/>
+            <a:ext cx="457200" cy="274320"/>
+          </a:xfrm>
+          <a:prstGeom prst="rect">
+            <a:avLst/>
+          </a:prstGeom>
+          <a:extLst>
+            <a:ext uri="{C572A759-6A51-4108-AA02-DFA0A04FC94B}">
+              <ma14:wrappingTextBoxFlag xmlns:ma14="http://schemas.microsoft.com/office/mac/drawingml/2011/main" val="0"/>
+            </a:ext>
+          </a:extLst>
+        </p:spPr>
+        <p:txBody>
+          <a:bodyPr/>
+          <a:lstStyle>
+            <a:lvl1pPr>
+              <a:defRPr sz="1000">
+                <a:solidFill>
+                  <a:srgbClr val="8A93A0"/>
+                </a:solidFill>
+              </a:defRPr>
+            </a:lvl1pPr>
+          </a:lstStyle>
+          <a:p>
+            <a:pPr algn="r"/>
+            <a:fld id="{F7021451-1387-4CA6-816F-3879F97B5CBC}" type="slidenum">
+              <a:rPr b="0" lang="en-US"/>
+              <a:t>10</a:t>
+            </a:fld>
+            <a:endParaRPr lang="en-US"/>
+          </a:p>
+        </p:txBody>
+      </p:sp>
+    </p:spTree>
+  </p:cSld>
+  <p:clrMapOvr>
+    <a:masterClrMapping/>
+  </p:clrMapOvr>
+</p:sld>
+</file>
+
+<file path=ppt/slides/slide11.xml><?xml version="1.0" encoding="utf-8"?>
+<p:sld xmlns:a="http://schemas.openxmlformats.org/drawingml/2006/main" xmlns:r="http://schemas.openxmlformats.org/officeDocument/2006/relationships" xmlns:p="http://schemas.openxmlformats.org/presentationml/2006/main">
+  <p:cSld name="Slide 11">
+    <p:spTree>
+      <p:nvGrpSpPr>
+        <p:cNvPr id="1" name=""/>
+        <p:cNvGrpSpPr/>
+        <p:nvPr/>
+      </p:nvGrpSpPr>
+      <p:grpSpPr>
+        <a:xfrm>
+          <a:off x="0" y="0"/>
+          <a:ext cx="0" cy="0"/>
+          <a:chOff x="0" y="0"/>
+          <a:chExt cx="0" cy="0"/>
+        </a:xfrm>
+      </p:grpSpPr>
+      <p:sp>
+        <p:nvSpPr>
+          <p:cNvPr id="2" name="Text 1"/>
+          <p:cNvSpPr/>
+          <p:nvPr>
+            <p:ph idx="101" type="body" hasCustomPrompt="1"/>
+          </p:nvPr>
+        </p:nvSpPr>
+        <p:spPr>
+          <a:xfrm>
+            <a:off x="548640" y="365760"/>
+            <a:ext cx="10972800" cy="320040"/>
+          </a:xfrm>
+          <a:prstGeom prst="rect">
+            <a:avLst/>
+          </a:prstGeom>
+          <a:noFill/>
+          <a:ln/>
+        </p:spPr>
+        <p:txBody>
+          <a:bodyPr wrap="square" lIns="0" tIns="0" rIns="0" bIns="0" rtlCol="0"/>
+          <a:lstStyle/>
+          <a:p>
+            <a:pPr indent="0" marL="0">
+              <a:buNone/>
+            </a:pPr>
+            <a:r>
+              <a:rPr lang="en-US" sz="1300" b="1" spc="300" kern="0" dirty="0">
+                <a:solidFill>
+                  <a:schemeClr val="accent1"/>
+                </a:solidFill>
+              </a:rPr>
+              <a:t>REAL HARDWARE</a:t>
+            </a:r>
+            <a:endParaRPr lang="en-US" sz="1300" dirty="0"/>
+          </a:p>
+        </p:txBody>
+      </p:sp>
+      <p:sp>
+        <p:nvSpPr>
+          <p:cNvPr id="3" name="Text 1"/>
+          <p:cNvSpPr/>
+          <p:nvPr>
+            <p:ph idx="102" type="title" hasCustomPrompt="1"/>
+          </p:nvPr>
+        </p:nvSpPr>
+        <p:spPr>
+          <a:xfrm>
+            <a:off x="548640" y="685800"/>
+            <a:ext cx="11064240" cy="777240"/>
+          </a:xfrm>
+          <a:prstGeom prst="rect">
+            <a:avLst/>
+          </a:prstGeom>
+          <a:noFill/>
+          <a:ln/>
+        </p:spPr>
+        <p:txBody>
+          <a:bodyPr wrap="square" lIns="0" tIns="0" rIns="0" bIns="0" rtlCol="0" anchor="t"/>
+          <a:lstStyle/>
+          <a:p>
+            <a:pPr algn="l" indent="0" marL="0">
+              <a:buNone/>
+            </a:pPr>
+            <a:r>
+              <a:rPr lang="en-US" sz="3200" b="1" dirty="0">
+                <a:solidFill>
+                  <a:schemeClr val="tx1"/>
+                </a:solidFill>
+                <a:latin typeface="Cambria" pitchFamily="34" charset="0"/>
+                <a:ea typeface="Cambria" pitchFamily="34" charset="-122"/>
+                <a:cs typeface="Cambria" pitchFamily="34" charset="-120"/>
+              </a:rPr>
+              <a:t>Measured, not modelled: the page walk on a real CPU</a:t>
+            </a:r>
+            <a:endParaRPr lang="en-US" sz="3200" dirty="0"/>
+          </a:p>
+        </p:txBody>
+      </p:sp>
+      <p:pic>
+        <p:nvPicPr>
+          <p:cNvPr id="4" name="measure.png" descr="Browser measurement: time per read for spread and packed pages">    </p:cNvPr>
           <p:cNvPicPr>
             <a:picLocks noChangeAspect="1"/>
           </p:cNvPicPr>
@@ -2970,7 +3388,7 @@
         <p:spPr>
           <a:xfrm>
             <a:off x="548640" y="1645920"/>
-            <a:ext cx="7132320" cy="4184200"/>
+            <a:ext cx="7680960" cy="3924333"/>
           </a:xfrm>
           <a:prstGeom prst="rect">
             <a:avLst/>
@@ -2984,9 +3402,375 @@
           </a:effectLst>
         </p:spPr>
       </p:pic>
+      <p:sp>
+        <p:nvSpPr>
+          <p:cNvPr id="5" name="Gap value"/>
+          <p:cNvSpPr txBox="1"/>
+          <p:nvPr/>
+        </p:nvSpPr>
+        <p:spPr>
+          <a:xfrm>
+            <a:off x="8778240" y="1783080"/>
+            <a:ext cx="2834640" cy="685800"/>
+          </a:xfrm>
+          <a:prstGeom prst="rect">
+            <a:avLst/>
+          </a:prstGeom>
+          <a:noFill/>
+          <a:ln/>
+        </p:spPr>
+        <p:txBody>
+          <a:bodyPr wrap="square" lIns="0" tIns="0" rIns="0" bIns="0" rtlCol="0" anchor="ctr"/>
+          <a:lstStyle/>
+          <a:p>
+            <a:pPr indent="0" marL="0">
+              <a:buNone/>
+            </a:pPr>
+            <a:r>
+              <a:rPr lang="en-US" sz="4000" b="1" dirty="0">
+                <a:solidFill>
+                  <a:schemeClr val="accent1"/>
+                </a:solidFill>
+                <a:latin typeface="Cambria" pitchFamily="34" charset="0"/>
+                <a:ea typeface="Cambria" pitchFamily="34" charset="-122"/>
+                <a:cs typeface="Cambria" pitchFamily="34" charset="-120"/>
+              </a:rPr>
+              <a:t>3.3–3.6×</a:t>
+            </a:r>
+            <a:endParaRPr lang="en-US" sz="4000" dirty="0"/>
+          </a:p>
+        </p:txBody>
+      </p:sp>
+      <p:sp>
+        <p:nvSpPr>
+          <p:cNvPr id="6" name="Gap label"/>
+          <p:cNvSpPr txBox="1"/>
+          <p:nvPr/>
+        </p:nvSpPr>
+        <p:spPr>
+          <a:xfrm>
+            <a:off x="8778240" y="2496312"/>
+            <a:ext cx="2834640" cy="548640"/>
+          </a:xfrm>
+          <a:prstGeom prst="rect">
+            <a:avLst/>
+          </a:prstGeom>
+          <a:noFill/>
+          <a:ln/>
+        </p:spPr>
+        <p:txBody>
+          <a:bodyPr wrap="square" lIns="0" tIns="0" rIns="0" bIns="0" rtlCol="0" anchor="t"/>
+          <a:lstStyle/>
+          <a:p>
+            <a:pPr indent="0" marL="0">
+              <a:buNone/>
+            </a:pPr>
+            <a:r>
+              <a:rPr lang="en-US" sz="1400" dirty="0">
+                <a:solidFill>
+                  <a:schemeClr val="tx2"/>
+                </a:solidFill>
+              </a:rPr>
+              <a:t>slower per read at 16 MB when every read lands on a different page</a:t>
+            </a:r>
+            <a:endParaRPr lang="en-US" sz="1400" dirty="0"/>
+          </a:p>
+        </p:txBody>
+      </p:sp>
+      <p:sp>
+        <p:nvSpPr>
+          <p:cNvPr id="7" name="Knee value"/>
+          <p:cNvSpPr txBox="1"/>
+          <p:nvPr/>
+        </p:nvSpPr>
+        <p:spPr>
+          <a:xfrm>
+            <a:off x="8778240" y="3246120"/>
+            <a:ext cx="2834640" cy="685800"/>
+          </a:xfrm>
+          <a:prstGeom prst="rect">
+            <a:avLst/>
+          </a:prstGeom>
+          <a:noFill/>
+          <a:ln/>
+        </p:spPr>
+        <p:txBody>
+          <a:bodyPr wrap="square" lIns="0" tIns="0" rIns="0" bIns="0" rtlCol="0" anchor="ctr"/>
+          <a:lstStyle/>
+          <a:p>
+            <a:pPr indent="0" marL="0">
+              <a:buNone/>
+            </a:pPr>
+            <a:r>
+              <a:rPr lang="en-US" sz="4000" b="1" dirty="0">
+                <a:solidFill>
+                  <a:schemeClr val="accent2"/>
+                </a:solidFill>
+                <a:latin typeface="Cambria" pitchFamily="34" charset="0"/>
+                <a:ea typeface="Cambria" pitchFamily="34" charset="-122"/>
+                <a:cs typeface="Cambria" pitchFamily="34" charset="-120"/>
+              </a:rPr>
+              <a:t>≈ 64 pages</a:t>
+            </a:r>
+            <a:endParaRPr lang="en-US" sz="4000" dirty="0"/>
+          </a:p>
+        </p:txBody>
+      </p:sp>
+      <p:sp>
+        <p:nvSpPr>
+          <p:cNvPr id="8" name="Knee label"/>
+          <p:cNvSpPr txBox="1"/>
+          <p:nvPr/>
+        </p:nvSpPr>
+        <p:spPr>
+          <a:xfrm>
+            <a:off x="8778240" y="3959352"/>
+            <a:ext cx="2834640" cy="548640"/>
+          </a:xfrm>
+          <a:prstGeom prst="rect">
+            <a:avLst/>
+          </a:prstGeom>
+          <a:noFill/>
+          <a:ln/>
+        </p:spPr>
+        <p:txBody>
+          <a:bodyPr wrap="square" lIns="0" tIns="0" rIns="0" bIns="0" rtlCol="0" anchor="t"/>
+          <a:lstStyle/>
+          <a:p>
+            <a:pPr indent="0" marL="0">
+              <a:buNone/>
+            </a:pPr>
+            <a:r>
+              <a:rPr lang="en-US" sz="1400" dirty="0">
+                <a:solidFill>
+                  <a:schemeClr val="tx2"/>
+                </a:solidFill>
+              </a:rPr>
+              <a:t>where the gap starts: the size of a first-level TLB</a:t>
+            </a:r>
+            <a:endParaRPr lang="en-US" sz="1400" dirty="0"/>
+          </a:p>
+        </p:txBody>
+      </p:sp>
+      <p:sp>
+        <p:nvSpPr>
+          <p:cNvPr id="9" name="Method note"/>
+          <p:cNvSpPr txBox="1"/>
+          <p:nvPr/>
+        </p:nvSpPr>
+        <p:spPr>
+          <a:xfrm>
+            <a:off x="8778240" y="4663440"/>
+            <a:ext cx="2834640" cy="1463040"/>
+          </a:xfrm>
+          <a:prstGeom prst="rect">
+            <a:avLst/>
+          </a:prstGeom>
+          <a:noFill/>
+          <a:ln/>
+        </p:spPr>
+        <p:txBody>
+          <a:bodyPr wrap="square" lIns="0" tIns="0" rIns="0" bIns="0" rtlCol="0" anchor="t"/>
+          <a:lstStyle/>
+          <a:p>
+            <a:pPr indent="0" marL="0">
+              <a:buNone/>
+            </a:pPr>
+            <a:r>
+              <a:rPr lang="en-US" sz="1300" dirty="0">
+                <a:solidFill>
+                  <a:schemeClr val="tx2"/>
+                </a:solidFill>
+              </a:rPr>
+              <a:t>Same number of reads both ways; only the number of pages differs, so the gap is translation cost. Our laptop, Chromium, two runs. Each viewer measures their own machine.</a:t>
+            </a:r>
+            <a:endParaRPr lang="en-US" sz="1300" dirty="0"/>
+          </a:p>
+        </p:txBody>
+      </p:sp>
+      <p:sp>
+        <p:nvSpPr>
+          <p:cNvPr id="25" name="Slide Number Placeholder 0"/>
+          <p:cNvSpPr>
+            <a:spLocks noGrp="1"/>
+          </p:cNvSpPr>
+          <p:nvPr>
+            <p:ph type="sldNum" sz="quarter" idx="4294967295"/>
+          </p:nvPr>
+        </p:nvSpPr>
+        <p:spPr>
+          <a:xfrm>
+            <a:off x="11247120" y="6400800"/>
+            <a:ext cx="457200" cy="274320"/>
+          </a:xfrm>
+          <a:prstGeom prst="rect">
+            <a:avLst/>
+          </a:prstGeom>
+          <a:extLst>
+            <a:ext uri="{C572A759-6A51-4108-AA02-DFA0A04FC94B}">
+              <ma14:wrappingTextBoxFlag xmlns:ma14="http://schemas.microsoft.com/office/mac/drawingml/2011/main" val="0"/>
+            </a:ext>
+          </a:extLst>
+        </p:spPr>
+        <p:txBody>
+          <a:bodyPr/>
+          <a:lstStyle>
+            <a:lvl1pPr>
+              <a:defRPr sz="1000">
+                <a:solidFill>
+                  <a:srgbClr val="8A93A0"/>
+                </a:solidFill>
+              </a:defRPr>
+            </a:lvl1pPr>
+          </a:lstStyle>
+          <a:p>
+            <a:pPr algn="r"/>
+            <a:fld id="{F7021451-1387-4CA6-816F-3879F97B5CBC}" type="slidenum">
+              <a:rPr b="0" lang="en-US"/>
+              <a:t>11</a:t>
+            </a:fld>
+            <a:endParaRPr lang="en-US"/>
+          </a:p>
+        </p:txBody>
+      </p:sp>
+    </p:spTree>
+  </p:cSld>
+  <p:clrMapOvr>
+    <a:masterClrMapping/>
+  </p:clrMapOvr>
+</p:sld>
+</file>
+
+<file path=ppt/slides/slide12.xml><?xml version="1.0" encoding="utf-8"?>
+<p:sld xmlns:a="http://schemas.openxmlformats.org/drawingml/2006/main" xmlns:r="http://schemas.openxmlformats.org/officeDocument/2006/relationships" xmlns:p="http://schemas.openxmlformats.org/presentationml/2006/main">
+  <p:cSld name="Slide 12">
+    <p:spTree>
+      <p:nvGrpSpPr>
+        <p:cNvPr id="1" name=""/>
+        <p:cNvGrpSpPr/>
+        <p:nvPr/>
+      </p:nvGrpSpPr>
+      <p:grpSpPr>
+        <a:xfrm>
+          <a:off x="0" y="0"/>
+          <a:ext cx="0" cy="0"/>
+          <a:chOff x="0" y="0"/>
+          <a:chExt cx="0" cy="0"/>
+        </a:xfrm>
+      </p:grpSpPr>
+      <p:sp>
+        <p:nvSpPr>
+          <p:cNvPr id="2" name="Text 1"/>
+          <p:cNvSpPr/>
+          <p:nvPr>
+            <p:ph idx="101" type="body" hasCustomPrompt="1"/>
+          </p:nvPr>
+        </p:nvSpPr>
+        <p:spPr>
+          <a:xfrm>
+            <a:off x="548640" y="365760"/>
+            <a:ext cx="10972800" cy="320040"/>
+          </a:xfrm>
+          <a:prstGeom prst="rect">
+            <a:avLst/>
+          </a:prstGeom>
+          <a:noFill/>
+          <a:ln/>
+        </p:spPr>
+        <p:txBody>
+          <a:bodyPr wrap="square" lIns="0" tIns="0" rIns="0" bIns="0" rtlCol="0"/>
+          <a:lstStyle/>
+          <a:p>
+            <a:pPr indent="0" marL="0">
+              <a:buNone/>
+            </a:pPr>
+            <a:r>
+              <a:rPr lang="en-US" sz="1300" b="1" spc="300" kern="0" dirty="0">
+                <a:solidFill>
+                  <a:schemeClr val="accent1"/>
+                </a:solidFill>
+              </a:rPr>
+              <a:t>FOR QUESTIONS</a:t>
+            </a:r>
+            <a:endParaRPr lang="en-US" sz="1300" dirty="0"/>
+          </a:p>
+        </p:txBody>
+      </p:sp>
+      <p:sp>
+        <p:nvSpPr>
+          <p:cNvPr id="3" name="Text 1"/>
+          <p:cNvSpPr/>
+          <p:nvPr>
+            <p:ph idx="102" type="title" hasCustomPrompt="1"/>
+          </p:nvPr>
+        </p:nvSpPr>
+        <p:spPr>
+          <a:xfrm>
+            <a:off x="548640" y="685800"/>
+            <a:ext cx="11064240" cy="777240"/>
+          </a:xfrm>
+          <a:prstGeom prst="rect">
+            <a:avLst/>
+          </a:prstGeom>
+          <a:noFill/>
+          <a:ln/>
+        </p:spPr>
+        <p:txBody>
+          <a:bodyPr wrap="square" lIns="0" tIns="0" rIns="0" bIns="0" rtlCol="0" anchor="t"/>
+          <a:lstStyle/>
+          <a:p>
+            <a:pPr algn="l" indent="0" marL="0">
+              <a:buNone/>
+            </a:pPr>
+            <a:r>
+              <a:rPr lang="en-US" sz="3200" b="1" dirty="0">
+                <a:solidFill>
+                  <a:schemeClr val="tx1"/>
+                </a:solidFill>
+                <a:latin typeface="Cambria" pitchFamily="34" charset="0"/>
+                <a:ea typeface="Cambria" pitchFamily="34" charset="-122"/>
+                <a:cs typeface="Cambria" pitchFamily="34" charset="-120"/>
+              </a:rPr>
+              <a:t>The real entry bits are one click away</a:t>
+            </a:r>
+            <a:endParaRPr lang="en-US" sz="3200" dirty="0"/>
+          </a:p>
+        </p:txBody>
+      </p:sp>
+      <p:pic>
+        <p:nvPicPr>
+          <p:cNvPr id="4" name="entries.png" descr="Expanded section with each entry read and its flag bits">    </p:cNvPr>
+          <p:cNvPicPr>
+            <a:picLocks noChangeAspect="1"/>
+          </p:cNvPicPr>
+          <p:nvPr/>
+        </p:nvPicPr>
+        <p:blipFill>
+          <a:blip r:embed="rId1"/>
+          <a:stretch>
+            <a:fillRect/>
+          </a:stretch>
+        </p:blipFill>
+        <p:spPr>
+          <a:xfrm>
+            <a:off x="548640" y="1645920"/>
+            <a:ext cx="7132320" cy="4184200"/>
+          </a:xfrm>
+          <a:prstGeom prst="rect">
+            <a:avLst/>
+          </a:prstGeom>
+          <a:effectLst>
+            <a:outerShdw sx="100000" sy="100000" kx="0" ky="0" algn="bl" rotWithShape="0" blurRad="76200" dist="25400" dir="5400000">
+              <a:srgbClr val="9AA3AE">
+                <a:alpha val="35000"/>
+              </a:srgbClr>
+            </a:outerShdw>
+          </a:effectLst>
+        </p:spPr>
+      </p:pic>
       <p:graphicFrame>
         <p:nvGraphicFramePr>
-          <p:cNvPr id="11" name="Flag table"/>
+          <p:cNvPr id="13" name="Flag table"/>
           <p:cNvGraphicFramePr>
             <a:graphicFrameLocks noGrp="1"/>
           </p:cNvGraphicFramePr>
@@ -4081,7 +4865,7 @@
             <a:pPr algn="r"/>
             <a:fld id="{F7021451-1387-4CA6-816F-3879F97B5CBC}" type="slidenum">
               <a:rPr b="0" lang="en-US"/>
-              <a:t>10</a:t>
+              <a:t>12</a:t>
             </a:fld>
             <a:endParaRPr lang="en-US"/>
           </a:p>
@@ -4095,9 +4879,9 @@
 </p:sld>
 </file>
 
-<file path=ppt/slides/slide11.xml><?xml version="1.0" encoding="utf-8"?>
+<file path=ppt/slides/slide13.xml><?xml version="1.0" encoding="utf-8"?>
 <p:sld xmlns:a="http://schemas.openxmlformats.org/drawingml/2006/main" xmlns:r="http://schemas.openxmlformats.org/officeDocument/2006/relationships" xmlns:p="http://schemas.openxmlformats.org/presentationml/2006/main">
-  <p:cSld name="Slide 11">
+  <p:cSld name="Slide 13">
     <p:spTree>
       <p:nvGrpSpPr>
         <p:cNvPr id="1" name=""/>
@@ -4185,7 +4969,7 @@
                 <a:ea typeface="Cambria" pitchFamily="34" charset="-122"/>
                 <a:cs typeface="Cambria" pitchFamily="34" charset="-120"/>
               </a:rPr>
-              <a:t>Two new files, three updated, tests removed</a:t>
+              <a:t>Three new files, three updated</a:t>
             </a:r>
             <a:endParaRPr lang="en-US" sz="3200" dirty="0"/>
           </a:p>
@@ -4193,7 +4977,7 @@
       </p:sp>
       <p:graphicFrame>
         <p:nvGraphicFramePr>
-          <p:cNvPr id="12" name="Change table"/>
+          <p:cNvPr id="14" name="Change table"/>
           <p:cNvGraphicFramePr>
             <a:graphicFrameLocks noGrp="1"/>
           </p:cNvGraphicFramePr>
@@ -4214,11 +4998,11 @@
             <a:tbl>
               <a:tblPr/>
               <a:tblGrid>
-                <a:gridCol w="1920240"/>
-                <a:gridCol w="1097280"/>
+                <a:gridCol w="2011680"/>
+                <a:gridCol w="1005840"/>
                 <a:gridCol w="3931920"/>
               </a:tblGrid>
-              <a:tr h="566928">
+              <a:tr h="548640">
                 <a:tc>
                   <a:txBody>
                     <a:bodyPr/>
@@ -4403,7 +5187,7 @@
                   </a:tcPr>
                 </a:tc>
               </a:tr>
-              <a:tr h="566928">
+              <a:tr h="548640">
                 <a:tc>
                   <a:txBody>
                     <a:bodyPr/>
@@ -4540,7 +5324,7 @@
                             <a:srgbClr val="16202E"/>
                           </a:solidFill>
                         </a:rPr>
-                        <a:t>Model of the four-level walk: entry bits, faults, large pages, TLB, walk cache</a:t>
+                        <a:t>Model of the four-level walk: faults, large pages, TLB, walk cache, VM mode</a:t>
                       </a:r>
                       <a:endParaRPr lang="en-US" sz="1400" dirty="0"/>
                     </a:p>
@@ -4588,7 +5372,7 @@
                   </a:tcPr>
                 </a:tc>
               </a:tr>
-              <a:tr h="566928">
+              <a:tr h="548640">
                 <a:tc>
                   <a:txBody>
                     <a:bodyPr/>
@@ -4773,7 +5557,192 @@
                   </a:tcPr>
                 </a:tc>
               </a:tr>
-              <a:tr h="566928">
+              <a:tr h="548640">
+                <a:tc>
+                  <a:txBody>
+                    <a:bodyPr/>
+                    <a:lstStyle/>
+                    <a:p>
+                      <a:pPr indent="0" marL="0">
+                        <a:buNone/>
+                      </a:pPr>
+                      <a:r>
+                        <a:rPr lang="en-US" sz="1400" b="1" dirty="0">
+                          <a:solidFill>
+                            <a:srgbClr val="16202E"/>
+                          </a:solidFill>
+                        </a:rPr>
+                        <a:t>views/measure.html</a:t>
+                      </a:r>
+                      <a:endParaRPr lang="en-US" sz="1400" dirty="0"/>
+                    </a:p>
+                  </a:txBody>
+                  <a:tcPr marL="73152" marR="73152" marT="73152" marB="73152" anchor="ctr">
+                    <a:lnL w="6350" cap="flat" cmpd="sng" algn="ctr">
+                      <a:solidFill>
+                        <a:srgbClr val="D9DEE5"/>
+                      </a:solidFill>
+                      <a:prstDash val="solid"/>
+                      <a:round/>
+                      <a:headEnd type="none" w="med" len="med"/>
+                      <a:tailEnd type="none" w="med" len="med"/>
+                    </a:lnL>
+                    <a:lnR w="6350" cap="flat" cmpd="sng" algn="ctr">
+                      <a:solidFill>
+                        <a:srgbClr val="D9DEE5"/>
+                      </a:solidFill>
+                      <a:prstDash val="solid"/>
+                      <a:round/>
+                      <a:headEnd type="none" w="med" len="med"/>
+                      <a:tailEnd type="none" w="med" len="med"/>
+                    </a:lnR>
+                    <a:lnT w="6350" cap="flat" cmpd="sng" algn="ctr">
+                      <a:solidFill>
+                        <a:srgbClr val="D9DEE5"/>
+                      </a:solidFill>
+                      <a:prstDash val="solid"/>
+                      <a:round/>
+                      <a:headEnd type="none" w="med" len="med"/>
+                      <a:tailEnd type="none" w="med" len="med"/>
+                    </a:lnT>
+                    <a:lnB w="6350" cap="flat" cmpd="sng" algn="ctr">
+                      <a:solidFill>
+                        <a:srgbClr val="D9DEE5"/>
+                      </a:solidFill>
+                      <a:prstDash val="solid"/>
+                      <a:round/>
+                      <a:headEnd type="none" w="med" len="med"/>
+                      <a:tailEnd type="none" w="med" len="med"/>
+                    </a:lnB>
+                    <a:solidFill>
+                      <a:srgbClr val="F2F4F7"/>
+                    </a:solidFill>
+                  </a:tcPr>
+                </a:tc>
+                <a:tc>
+                  <a:txBody>
+                    <a:bodyPr/>
+                    <a:lstStyle/>
+                    <a:p>
+                      <a:pPr indent="0" marL="0">
+                        <a:buNone/>
+                      </a:pPr>
+                      <a:r>
+                        <a:rPr lang="en-US" sz="1400" b="1" dirty="0">
+                          <a:solidFill>
+                            <a:srgbClr val="1A7F5A"/>
+                          </a:solidFill>
+                        </a:rPr>
+                        <a:t>New</a:t>
+                      </a:r>
+                      <a:endParaRPr lang="en-US" sz="1400" dirty="0"/>
+                    </a:p>
+                  </a:txBody>
+                  <a:tcPr marL="73152" marR="73152" marT="73152" marB="73152" anchor="ctr">
+                    <a:lnL w="6350" cap="flat" cmpd="sng" algn="ctr">
+                      <a:solidFill>
+                        <a:srgbClr val="D9DEE5"/>
+                      </a:solidFill>
+                      <a:prstDash val="solid"/>
+                      <a:round/>
+                      <a:headEnd type="none" w="med" len="med"/>
+                      <a:tailEnd type="none" w="med" len="med"/>
+                    </a:lnL>
+                    <a:lnR w="6350" cap="flat" cmpd="sng" algn="ctr">
+                      <a:solidFill>
+                        <a:srgbClr val="D9DEE5"/>
+                      </a:solidFill>
+                      <a:prstDash val="solid"/>
+                      <a:round/>
+                      <a:headEnd type="none" w="med" len="med"/>
+                      <a:tailEnd type="none" w="med" len="med"/>
+                    </a:lnR>
+                    <a:lnT w="6350" cap="flat" cmpd="sng" algn="ctr">
+                      <a:solidFill>
+                        <a:srgbClr val="D9DEE5"/>
+                      </a:solidFill>
+                      <a:prstDash val="solid"/>
+                      <a:round/>
+                      <a:headEnd type="none" w="med" len="med"/>
+                      <a:tailEnd type="none" w="med" len="med"/>
+                    </a:lnT>
+                    <a:lnB w="6350" cap="flat" cmpd="sng" algn="ctr">
+                      <a:solidFill>
+                        <a:srgbClr val="D9DEE5"/>
+                      </a:solidFill>
+                      <a:prstDash val="solid"/>
+                      <a:round/>
+                      <a:headEnd type="none" w="med" len="med"/>
+                      <a:tailEnd type="none" w="med" len="med"/>
+                    </a:lnB>
+                    <a:solidFill>
+                      <a:srgbClr val="F2F4F7"/>
+                    </a:solidFill>
+                  </a:tcPr>
+                </a:tc>
+                <a:tc>
+                  <a:txBody>
+                    <a:bodyPr/>
+                    <a:lstStyle/>
+                    <a:p>
+                      <a:pPr indent="0" marL="0">
+                        <a:buNone/>
+                      </a:pPr>
+                      <a:r>
+                        <a:rPr lang="en-US" sz="1400" dirty="0">
+                          <a:solidFill>
+                            <a:srgbClr val="16202E"/>
+                          </a:solidFill>
+                        </a:rPr>
+                        <a:t>Real TLB test that runs in the viewer's browser</a:t>
+                      </a:r>
+                      <a:endParaRPr lang="en-US" sz="1400" dirty="0"/>
+                    </a:p>
+                  </a:txBody>
+                  <a:tcPr marL="73152" marR="73152" marT="73152" marB="73152" anchor="ctr">
+                    <a:lnL w="6350" cap="flat" cmpd="sng" algn="ctr">
+                      <a:solidFill>
+                        <a:srgbClr val="D9DEE5"/>
+                      </a:solidFill>
+                      <a:prstDash val="solid"/>
+                      <a:round/>
+                      <a:headEnd type="none" w="med" len="med"/>
+                      <a:tailEnd type="none" w="med" len="med"/>
+                    </a:lnL>
+                    <a:lnR w="6350" cap="flat" cmpd="sng" algn="ctr">
+                      <a:solidFill>
+                        <a:srgbClr val="D9DEE5"/>
+                      </a:solidFill>
+                      <a:prstDash val="solid"/>
+                      <a:round/>
+                      <a:headEnd type="none" w="med" len="med"/>
+                      <a:tailEnd type="none" w="med" len="med"/>
+                    </a:lnR>
+                    <a:lnT w="6350" cap="flat" cmpd="sng" algn="ctr">
+                      <a:solidFill>
+                        <a:srgbClr val="D9DEE5"/>
+                      </a:solidFill>
+                      <a:prstDash val="solid"/>
+                      <a:round/>
+                      <a:headEnd type="none" w="med" len="med"/>
+                      <a:tailEnd type="none" w="med" len="med"/>
+                    </a:lnT>
+                    <a:lnB w="6350" cap="flat" cmpd="sng" algn="ctr">
+                      <a:solidFill>
+                        <a:srgbClr val="D9DEE5"/>
+                      </a:solidFill>
+                      <a:prstDash val="solid"/>
+                      <a:round/>
+                      <a:headEnd type="none" w="med" len="med"/>
+                      <a:tailEnd type="none" w="med" len="med"/>
+                    </a:lnB>
+                    <a:solidFill>
+                      <a:srgbClr val="F2F4F7"/>
+                    </a:solidFill>
+                  </a:tcPr>
+                </a:tc>
+              </a:tr>
+              <a:tr h="548640">
                 <a:tc>
                   <a:txBody>
                     <a:bodyPr/>
@@ -4958,7 +5927,7 @@
                   </a:tcPr>
                 </a:tc>
               </a:tr>
-              <a:tr h="566928">
+              <a:tr h="548640">
                 <a:tc>
                   <a:txBody>
                     <a:bodyPr/>
@@ -5143,191 +6112,6 @@
                   </a:tcPr>
                 </a:tc>
               </a:tr>
-              <a:tr h="566928">
-                <a:tc>
-                  <a:txBody>
-                    <a:bodyPr/>
-                    <a:lstStyle/>
-                    <a:p>
-                      <a:pPr indent="0" marL="0">
-                        <a:buNone/>
-                      </a:pPr>
-                      <a:r>
-                        <a:rPr lang="en-US" sz="1400" b="1" dirty="0">
-                          <a:solidFill>
-                            <a:srgbClr val="16202E"/>
-                          </a:solidFill>
-                        </a:rPr>
-                        <a:t>tests/</a:t>
-                      </a:r>
-                      <a:endParaRPr lang="en-US" sz="1400" dirty="0"/>
-                    </a:p>
-                  </a:txBody>
-                  <a:tcPr marL="73152" marR="73152" marT="73152" marB="73152" anchor="ctr">
-                    <a:lnL w="6350" cap="flat" cmpd="sng" algn="ctr">
-                      <a:solidFill>
-                        <a:srgbClr val="D9DEE5"/>
-                      </a:solidFill>
-                      <a:prstDash val="solid"/>
-                      <a:round/>
-                      <a:headEnd type="none" w="med" len="med"/>
-                      <a:tailEnd type="none" w="med" len="med"/>
-                    </a:lnL>
-                    <a:lnR w="6350" cap="flat" cmpd="sng" algn="ctr">
-                      <a:solidFill>
-                        <a:srgbClr val="D9DEE5"/>
-                      </a:solidFill>
-                      <a:prstDash val="solid"/>
-                      <a:round/>
-                      <a:headEnd type="none" w="med" len="med"/>
-                      <a:tailEnd type="none" w="med" len="med"/>
-                    </a:lnR>
-                    <a:lnT w="6350" cap="flat" cmpd="sng" algn="ctr">
-                      <a:solidFill>
-                        <a:srgbClr val="D9DEE5"/>
-                      </a:solidFill>
-                      <a:prstDash val="solid"/>
-                      <a:round/>
-                      <a:headEnd type="none" w="med" len="med"/>
-                      <a:tailEnd type="none" w="med" len="med"/>
-                    </a:lnT>
-                    <a:lnB w="6350" cap="flat" cmpd="sng" algn="ctr">
-                      <a:solidFill>
-                        <a:srgbClr val="D9DEE5"/>
-                      </a:solidFill>
-                      <a:prstDash val="solid"/>
-                      <a:round/>
-                      <a:headEnd type="none" w="med" len="med"/>
-                      <a:tailEnd type="none" w="med" len="med"/>
-                    </a:lnB>
-                    <a:solidFill>
-                      <a:srgbClr val="F2F4F7"/>
-                    </a:solidFill>
-                  </a:tcPr>
-                </a:tc>
-                <a:tc>
-                  <a:txBody>
-                    <a:bodyPr/>
-                    <a:lstStyle/>
-                    <a:p>
-                      <a:pPr indent="0" marL="0">
-                        <a:buNone/>
-                      </a:pPr>
-                      <a:r>
-                        <a:rPr lang="en-US" sz="1400" b="1" dirty="0">
-                          <a:solidFill>
-                            <a:srgbClr val="B44D14"/>
-                          </a:solidFill>
-                        </a:rPr>
-                        <a:t>Removed</a:t>
-                      </a:r>
-                      <a:endParaRPr lang="en-US" sz="1400" dirty="0"/>
-                    </a:p>
-                  </a:txBody>
-                  <a:tcPr marL="73152" marR="73152" marT="73152" marB="73152" anchor="ctr">
-                    <a:lnL w="6350" cap="flat" cmpd="sng" algn="ctr">
-                      <a:solidFill>
-                        <a:srgbClr val="D9DEE5"/>
-                      </a:solidFill>
-                      <a:prstDash val="solid"/>
-                      <a:round/>
-                      <a:headEnd type="none" w="med" len="med"/>
-                      <a:tailEnd type="none" w="med" len="med"/>
-                    </a:lnL>
-                    <a:lnR w="6350" cap="flat" cmpd="sng" algn="ctr">
-                      <a:solidFill>
-                        <a:srgbClr val="D9DEE5"/>
-                      </a:solidFill>
-                      <a:prstDash val="solid"/>
-                      <a:round/>
-                      <a:headEnd type="none" w="med" len="med"/>
-                      <a:tailEnd type="none" w="med" len="med"/>
-                    </a:lnR>
-                    <a:lnT w="6350" cap="flat" cmpd="sng" algn="ctr">
-                      <a:solidFill>
-                        <a:srgbClr val="D9DEE5"/>
-                      </a:solidFill>
-                      <a:prstDash val="solid"/>
-                      <a:round/>
-                      <a:headEnd type="none" w="med" len="med"/>
-                      <a:tailEnd type="none" w="med" len="med"/>
-                    </a:lnT>
-                    <a:lnB w="6350" cap="flat" cmpd="sng" algn="ctr">
-                      <a:solidFill>
-                        <a:srgbClr val="D9DEE5"/>
-                      </a:solidFill>
-                      <a:prstDash val="solid"/>
-                      <a:round/>
-                      <a:headEnd type="none" w="med" len="med"/>
-                      <a:tailEnd type="none" w="med" len="med"/>
-                    </a:lnB>
-                    <a:solidFill>
-                      <a:srgbClr val="F2F4F7"/>
-                    </a:solidFill>
-                  </a:tcPr>
-                </a:tc>
-                <a:tc>
-                  <a:txBody>
-                    <a:bodyPr/>
-                    <a:lstStyle/>
-                    <a:p>
-                      <a:pPr indent="0" marL="0">
-                        <a:buNone/>
-                      </a:pPr>
-                      <a:r>
-                        <a:rPr lang="en-US" sz="1400" dirty="0">
-                          <a:solidFill>
-                            <a:srgbClr val="16202E"/>
-                          </a:solidFill>
-                        </a:rPr>
-                        <a:t>Not needed for the hosted app</a:t>
-                      </a:r>
-                      <a:endParaRPr lang="en-US" sz="1400" dirty="0"/>
-                    </a:p>
-                  </a:txBody>
-                  <a:tcPr marL="73152" marR="73152" marT="73152" marB="73152" anchor="ctr">
-                    <a:lnL w="6350" cap="flat" cmpd="sng" algn="ctr">
-                      <a:solidFill>
-                        <a:srgbClr val="D9DEE5"/>
-                      </a:solidFill>
-                      <a:prstDash val="solid"/>
-                      <a:round/>
-                      <a:headEnd type="none" w="med" len="med"/>
-                      <a:tailEnd type="none" w="med" len="med"/>
-                    </a:lnL>
-                    <a:lnR w="6350" cap="flat" cmpd="sng" algn="ctr">
-                      <a:solidFill>
-                        <a:srgbClr val="D9DEE5"/>
-                      </a:solidFill>
-                      <a:prstDash val="solid"/>
-                      <a:round/>
-                      <a:headEnd type="none" w="med" len="med"/>
-                      <a:tailEnd type="none" w="med" len="med"/>
-                    </a:lnR>
-                    <a:lnT w="6350" cap="flat" cmpd="sng" algn="ctr">
-                      <a:solidFill>
-                        <a:srgbClr val="D9DEE5"/>
-                      </a:solidFill>
-                      <a:prstDash val="solid"/>
-                      <a:round/>
-                      <a:headEnd type="none" w="med" len="med"/>
-                      <a:tailEnd type="none" w="med" len="med"/>
-                    </a:lnT>
-                    <a:lnB w="6350" cap="flat" cmpd="sng" algn="ctr">
-                      <a:solidFill>
-                        <a:srgbClr val="D9DEE5"/>
-                      </a:solidFill>
-                      <a:prstDash val="solid"/>
-                      <a:round/>
-                      <a:headEnd type="none" w="med" len="med"/>
-                      <a:tailEnd type="none" w="med" len="med"/>
-                    </a:lnB>
-                    <a:solidFill>
-                      <a:srgbClr val="F2F4F7"/>
-                    </a:solidFill>
-                  </a:tcPr>
-                </a:tc>
-              </a:tr>
             </a:tbl>
           </a:graphicData>
         </a:graphic>
@@ -5483,7 +6267,7 @@
                   <a:schemeClr val="tx1"/>
                 </a:solidFill>
               </a:rPr>
-              <a:t>Each click is a few microseconds of Python</a:t>
+              <a:t>The hardware test runs in the viewer's browser, not on the server</a:t>
             </a:r>
             <a:endParaRPr lang="en-US" sz="1500" dirty="0"/>
           </a:p>
@@ -5528,7 +6312,7 @@
             <a:pPr algn="r"/>
             <a:fld id="{F7021451-1387-4CA6-816F-3879F97B5CBC}" type="slidenum">
               <a:rPr b="0" lang="en-US"/>
-              <a:t>11</a:t>
+              <a:t>13</a:t>
             </a:fld>
             <a:endParaRPr lang="en-US"/>
           </a:p>
@@ -5542,9 +6326,9 @@
 </p:sld>
 </file>
 
-<file path=ppt/slides/slide12.xml><?xml version="1.0" encoding="utf-8"?>
+<file path=ppt/slides/slide14.xml><?xml version="1.0" encoding="utf-8"?>
 <p:sld xmlns:a="http://schemas.openxmlformats.org/drawingml/2006/main" xmlns:r="http://schemas.openxmlformats.org/officeDocument/2006/relationships" xmlns:p="http://schemas.openxmlformats.org/presentationml/2006/main">
-  <p:cSld name="Slide 12">
+  <p:cSld name="Slide 14">
     <p:spTree>
       <p:nvGrpSpPr>
         <p:cNvPr id="1" name=""/>
@@ -5591,7 +6375,7 @@
                   <a:srgbClr val="F2A65A"/>
                 </a:solidFill>
               </a:rPr>
-              <a:t>LIVE DEMO · ABOUT ONE MINUTE</a:t>
+              <a:t>LIVE DEMO · ABOUT TWO MINUTES</a:t>
             </a:r>
             <a:endParaRPr lang="en-US" sz="1400" dirty="0"/>
           </a:p>
@@ -5646,7 +6430,7 @@
         </p:nvSpPr>
         <p:spPr>
           <a:xfrm>
-            <a:off x="685800" y="2331720"/>
+            <a:off x="685800" y="2514600"/>
             <a:ext cx="502920" cy="502920"/>
           </a:xfrm>
           <a:prstGeom prst="ellipse">
@@ -5671,7 +6455,7 @@
         </p:nvSpPr>
         <p:spPr>
           <a:xfrm>
-            <a:off x="685800" y="2331720"/>
+            <a:off x="685800" y="2514600"/>
             <a:ext cx="502920" cy="502920"/>
           </a:xfrm>
           <a:prstGeom prst="rect">
@@ -5707,8 +6491,8 @@
         </p:nvSpPr>
         <p:spPr>
           <a:xfrm>
-            <a:off x="1371600" y="2331720"/>
-            <a:ext cx="9601200" cy="502920"/>
+            <a:off x="1371600" y="2514600"/>
+            <a:ext cx="4754880" cy="502920"/>
           </a:xfrm>
           <a:prstGeom prst="rect">
             <a:avLst/>
@@ -5729,7 +6513,7 @@
                   <a:srgbClr val="FFFFFF"/>
                 </a:solidFill>
               </a:rPr>
-              <a:t>New heap page: page fault, Windows builds the tables</a:t>
+              <a:t>New heap page: page fault, tables built</a:t>
             </a:r>
             <a:endParaRPr lang="en-US" sz="1800" dirty="0"/>
           </a:p>
@@ -5743,7 +6527,7 @@
         </p:nvSpPr>
         <p:spPr>
           <a:xfrm>
-            <a:off x="685800" y="3108960"/>
+            <a:off x="685800" y="3383280"/>
             <a:ext cx="502920" cy="502920"/>
           </a:xfrm>
           <a:prstGeom prst="ellipse">
@@ -5768,7 +6552,7 @@
         </p:nvSpPr>
         <p:spPr>
           <a:xfrm>
-            <a:off x="685800" y="3108960"/>
+            <a:off x="685800" y="3383280"/>
             <a:ext cx="502920" cy="502920"/>
           </a:xfrm>
           <a:prstGeom prst="rect">
@@ -5804,8 +6588,8 @@
         </p:nvSpPr>
         <p:spPr>
           <a:xfrm>
-            <a:off x="1371600" y="3108960"/>
-            <a:ext cx="9601200" cy="502920"/>
+            <a:off x="1371600" y="3383280"/>
+            <a:ext cx="4754880" cy="502920"/>
           </a:xfrm>
           <a:prstGeom prst="rect">
             <a:avLst/>
@@ -5826,7 +6610,7 @@
                   <a:srgbClr val="FFFFFF"/>
                 </a:solidFill>
               </a:rPr>
-              <a:t>New heap page again: the walk cache skips three levels</a:t>
+              <a:t>New heap page again: walk cache skips 3 levels</a:t>
             </a:r>
             <a:endParaRPr lang="en-US" sz="1800" dirty="0"/>
           </a:p>
@@ -5840,7 +6624,7 @@
         </p:nvSpPr>
         <p:spPr>
           <a:xfrm>
-            <a:off x="685800" y="3886200"/>
+            <a:off x="685800" y="4251960"/>
             <a:ext cx="502920" cy="502920"/>
           </a:xfrm>
           <a:prstGeom prst="ellipse">
@@ -5865,7 +6649,7 @@
         </p:nvSpPr>
         <p:spPr>
           <a:xfrm>
-            <a:off x="685800" y="3886200"/>
+            <a:off x="685800" y="4251960"/>
             <a:ext cx="502920" cy="502920"/>
           </a:xfrm>
           <a:prstGeom prst="rect">
@@ -5901,8 +6685,8 @@
         </p:nvSpPr>
         <p:spPr>
           <a:xfrm>
-            <a:off x="1371600" y="3886200"/>
-            <a:ext cx="9601200" cy="502920"/>
+            <a:off x="1371600" y="4251960"/>
+            <a:ext cx="4754880" cy="502920"/>
           </a:xfrm>
           <a:prstGeom prst="rect">
             <a:avLst/>
@@ -5937,7 +6721,7 @@
         </p:nvSpPr>
         <p:spPr>
           <a:xfrm>
-            <a:off x="685800" y="4663440"/>
+            <a:off x="685800" y="5120640"/>
             <a:ext cx="502920" cy="502920"/>
           </a:xfrm>
           <a:prstGeom prst="ellipse">
@@ -5962,7 +6746,7 @@
         </p:nvSpPr>
         <p:spPr>
           <a:xfrm>
-            <a:off x="685800" y="4663440"/>
+            <a:off x="685800" y="5120640"/>
             <a:ext cx="502920" cy="502920"/>
           </a:xfrm>
           <a:prstGeom prst="rect">
@@ -5998,8 +6782,8 @@
         </p:nvSpPr>
         <p:spPr>
           <a:xfrm>
-            <a:off x="1371600" y="4663440"/>
-            <a:ext cx="9601200" cy="502920"/>
+            <a:off x="1371600" y="5120640"/>
+            <a:ext cx="4754880" cy="502920"/>
           </a:xfrm>
           <a:prstGeom prst="rect">
             <a:avLst/>
@@ -6034,7 +6818,7 @@
         </p:nvSpPr>
         <p:spPr>
           <a:xfrm>
-            <a:off x="685800" y="5440680"/>
+            <a:off x="6263640" y="2514600"/>
             <a:ext cx="502920" cy="502920"/>
           </a:xfrm>
           <a:prstGeom prst="ellipse">
@@ -6059,7 +6843,7 @@
         </p:nvSpPr>
         <p:spPr>
           <a:xfrm>
-            <a:off x="685800" y="5440680"/>
+            <a:off x="6263640" y="2514600"/>
             <a:ext cx="502920" cy="502920"/>
           </a:xfrm>
           <a:prstGeom prst="rect">
@@ -6095,8 +6879,8 @@
         </p:nvSpPr>
         <p:spPr>
           <a:xfrm>
-            <a:off x="1371600" y="5440680"/>
-            <a:ext cx="9601200" cy="502920"/>
+            <a:off x="6949440" y="2514600"/>
+            <a:ext cx="4754880" cy="502920"/>
           </a:xfrm>
           <a:prstGeom prst="rect">
             <a:avLst/>
@@ -6117,7 +6901,201 @@
                   <a:srgbClr val="FFFFFF"/>
                 </a:solidFill>
               </a:rPr>
-              <a:t>Hardware: walk cache off, New heap page: all four levels read</a:t>
+              <a:t>Hardware → Inside a VM: 24 reads</a:t>
+            </a:r>
+            <a:endParaRPr lang="en-US" sz="1800" dirty="0"/>
+          </a:p>
+        </p:txBody>
+      </p:sp>
+      <p:sp>
+        <p:nvSpPr>
+          <p:cNvPr id="19" name="Step dot 6"/>
+          <p:cNvSpPr/>
+          <p:nvPr/>
+        </p:nvSpPr>
+        <p:spPr>
+          <a:xfrm>
+            <a:off x="6263640" y="3383280"/>
+            <a:ext cx="502920" cy="502920"/>
+          </a:xfrm>
+          <a:prstGeom prst="ellipse">
+            <a:avLst/>
+          </a:prstGeom>
+          <a:solidFill>
+            <a:srgbClr val="F2A65A"/>
+          </a:solidFill>
+          <a:ln w="12700">
+            <a:solidFill>
+              <a:srgbClr val="F2A65A"/>
+            </a:solidFill>
+            <a:prstDash val="solid"/>
+          </a:ln>
+        </p:spPr>
+      </p:sp>
+      <p:sp>
+        <p:nvSpPr>
+          <p:cNvPr id="20" name="Step number 6"/>
+          <p:cNvSpPr txBox="1"/>
+          <p:nvPr/>
+        </p:nvSpPr>
+        <p:spPr>
+          <a:xfrm>
+            <a:off x="6263640" y="3383280"/>
+            <a:ext cx="502920" cy="502920"/>
+          </a:xfrm>
+          <a:prstGeom prst="rect">
+            <a:avLst/>
+          </a:prstGeom>
+          <a:noFill/>
+          <a:ln/>
+        </p:spPr>
+        <p:txBody>
+          <a:bodyPr wrap="square" lIns="0" tIns="0" rIns="0" bIns="0" rtlCol="0" anchor="ctr"/>
+          <a:lstStyle/>
+          <a:p>
+            <a:pPr algn="ctr" indent="0" marL="0">
+              <a:buNone/>
+            </a:pPr>
+            <a:r>
+              <a:rPr lang="en-US" sz="1800" b="1" dirty="0">
+                <a:solidFill>
+                  <a:srgbClr val="16202E"/>
+                </a:solidFill>
+              </a:rPr>
+              <a:t>6</a:t>
+            </a:r>
+            <a:endParaRPr lang="en-US" sz="1800" dirty="0"/>
+          </a:p>
+        </p:txBody>
+      </p:sp>
+      <p:sp>
+        <p:nvSpPr>
+          <p:cNvPr id="21" name="Step 6"/>
+          <p:cNvSpPr txBox="1"/>
+          <p:nvPr/>
+        </p:nvSpPr>
+        <p:spPr>
+          <a:xfrm>
+            <a:off x="6949440" y="3383280"/>
+            <a:ext cx="4754880" cy="502920"/>
+          </a:xfrm>
+          <a:prstGeom prst="rect">
+            <a:avLst/>
+          </a:prstGeom>
+          <a:noFill/>
+          <a:ln/>
+        </p:spPr>
+        <p:txBody>
+          <a:bodyPr wrap="square" lIns="0" tIns="0" rIns="0" bIns="0" rtlCol="0" anchor="ctr"/>
+          <a:lstStyle/>
+          <a:p>
+            <a:pPr indent="0" marL="0">
+              <a:buNone/>
+            </a:pPr>
+            <a:r>
+              <a:rPr lang="en-US" sz="1800" dirty="0">
+                <a:solidFill>
+                  <a:srgbClr val="FFFFFF"/>
+                </a:solidFill>
+              </a:rPr>
+              <a:t>Hardware → walk cache off: compare the reads</a:t>
+            </a:r>
+            <a:endParaRPr lang="en-US" sz="1800" dirty="0"/>
+          </a:p>
+        </p:txBody>
+      </p:sp>
+      <p:sp>
+        <p:nvSpPr>
+          <p:cNvPr id="22" name="Step dot 7"/>
+          <p:cNvSpPr/>
+          <p:nvPr/>
+        </p:nvSpPr>
+        <p:spPr>
+          <a:xfrm>
+            <a:off x="6263640" y="4251960"/>
+            <a:ext cx="502920" cy="502920"/>
+          </a:xfrm>
+          <a:prstGeom prst="ellipse">
+            <a:avLst/>
+          </a:prstGeom>
+          <a:solidFill>
+            <a:srgbClr val="F2A65A"/>
+          </a:solidFill>
+          <a:ln w="12700">
+            <a:solidFill>
+              <a:srgbClr val="F2A65A"/>
+            </a:solidFill>
+            <a:prstDash val="solid"/>
+          </a:ln>
+        </p:spPr>
+      </p:sp>
+      <p:sp>
+        <p:nvSpPr>
+          <p:cNvPr id="23" name="Step number 7"/>
+          <p:cNvSpPr txBox="1"/>
+          <p:nvPr/>
+        </p:nvSpPr>
+        <p:spPr>
+          <a:xfrm>
+            <a:off x="6263640" y="4251960"/>
+            <a:ext cx="502920" cy="502920"/>
+          </a:xfrm>
+          <a:prstGeom prst="rect">
+            <a:avLst/>
+          </a:prstGeom>
+          <a:noFill/>
+          <a:ln/>
+        </p:spPr>
+        <p:txBody>
+          <a:bodyPr wrap="square" lIns="0" tIns="0" rIns="0" bIns="0" rtlCol="0" anchor="ctr"/>
+          <a:lstStyle/>
+          <a:p>
+            <a:pPr algn="ctr" indent="0" marL="0">
+              <a:buNone/>
+            </a:pPr>
+            <a:r>
+              <a:rPr lang="en-US" sz="1800" b="1" dirty="0">
+                <a:solidFill>
+                  <a:srgbClr val="16202E"/>
+                </a:solidFill>
+              </a:rPr>
+              <a:t>7</a:t>
+            </a:r>
+            <a:endParaRPr lang="en-US" sz="1800" dirty="0"/>
+          </a:p>
+        </p:txBody>
+      </p:sp>
+      <p:sp>
+        <p:nvSpPr>
+          <p:cNvPr id="24" name="Step 7"/>
+          <p:cNvSpPr txBox="1"/>
+          <p:nvPr/>
+        </p:nvSpPr>
+        <p:spPr>
+          <a:xfrm>
+            <a:off x="6949440" y="4251960"/>
+            <a:ext cx="4754880" cy="502920"/>
+          </a:xfrm>
+          <a:prstGeom prst="rect">
+            <a:avLst/>
+          </a:prstGeom>
+          <a:noFill/>
+          <a:ln/>
+        </p:spPr>
+        <p:txBody>
+          <a:bodyPr wrap="square" lIns="0" tIns="0" rIns="0" bIns="0" rtlCol="0" anchor="ctr"/>
+          <a:lstStyle/>
+          <a:p>
+            <a:pPr indent="0" marL="0">
+              <a:buNone/>
+            </a:pPr>
+            <a:r>
+              <a:rPr lang="en-US" sz="1800" dirty="0">
+                <a:solidFill>
+                  <a:srgbClr val="FFFFFF"/>
+                </a:solidFill>
+              </a:rPr>
+              <a:t>Measure this computer: real hardware, live</a:t>
             </a:r>
             <a:endParaRPr lang="en-US" sz="1800" dirty="0"/>
           </a:p>
@@ -6469,7 +7447,7 @@
                   <a:schemeClr val="tx1"/>
                 </a:solidFill>
               </a:rPr>
-              <a:t>A working model of the real four-level walk, its entry bits and its faults</a:t>
+              <a:t>A working model of the four-level walk, and of the 24-read walk inside a virtual machine</a:t>
             </a:r>
             <a:endParaRPr lang="en-US" sz="1700" dirty="0"/>
           </a:p>
@@ -6487,7 +7465,7 @@
                   <a:schemeClr val="tx1"/>
                 </a:solidFill>
               </a:rPr>
-              <a:t>One click per scenario; the walk animates level by level</a:t>
+              <a:t>A real hardware test that runs on the viewer's own computer</a:t>
             </a:r>
             <a:endParaRPr lang="en-US" sz="1700" dirty="0"/>
           </a:p>
@@ -6495,7 +7473,7 @@
       </p:sp>
       <p:sp>
         <p:nvSpPr>
-          <p:cNvPr id="11" name="Levels value"/>
+          <p:cNvPr id="11" name="VM value"/>
           <p:cNvSpPr txBox="1"/>
           <p:nvPr/>
         </p:nvSpPr>
@@ -6520,13 +7498,13 @@
             <a:r>
               <a:rPr lang="en-US" sz="4000" b="1" dirty="0">
                 <a:solidFill>
-                  <a:schemeClr val="accent1"/>
+                  <a:schemeClr val="accent6"/>
                 </a:solidFill>
                 <a:latin typeface="Cambria" pitchFamily="34" charset="0"/>
                 <a:ea typeface="Cambria" pitchFamily="34" charset="-122"/>
                 <a:cs typeface="Cambria" pitchFamily="34" charset="-120"/>
               </a:rPr>
-              <a:t>4 levels</a:t>
+              <a:t>4 → 24</a:t>
             </a:r>
             <a:endParaRPr lang="en-US" sz="4000" dirty="0"/>
           </a:p>
@@ -6534,7 +7512,7 @@
       </p:sp>
       <p:sp>
         <p:nvSpPr>
-          <p:cNvPr id="12" name="Levels label"/>
+          <p:cNvPr id="12" name="VM label"/>
           <p:cNvSpPr txBox="1"/>
           <p:nvPr/>
         </p:nvSpPr>
@@ -6562,7 +7540,7 @@
                   <a:schemeClr val="tx2"/>
                 </a:solidFill>
               </a:rPr>
-              <a:t>walked on every TLB miss, as on any 64-bit PC</a:t>
+              <a:t>reads per address walk, once Windows runs inside a virtual machine</a:t>
             </a:r>
             <a:endParaRPr lang="en-US" sz="1400" dirty="0"/>
           </a:p>
@@ -6570,7 +7548,7 @@
       </p:sp>
       <p:sp>
         <p:nvSpPr>
-          <p:cNvPr id="13" name="Scenarios value"/>
+          <p:cNvPr id="13" name="Measured value"/>
           <p:cNvSpPr txBox="1"/>
           <p:nvPr/>
         </p:nvSpPr>
@@ -6595,13 +7573,13 @@
             <a:r>
               <a:rPr lang="en-US" sz="4000" b="1" dirty="0">
                 <a:solidFill>
-                  <a:schemeClr val="accent2"/>
+                  <a:schemeClr val="accent1"/>
                 </a:solidFill>
                 <a:latin typeface="Cambria" pitchFamily="34" charset="0"/>
                 <a:ea typeface="Cambria" pitchFamily="34" charset="-122"/>
                 <a:cs typeface="Cambria" pitchFamily="34" charset="-120"/>
               </a:rPr>
-              <a:t>3</a:t>
+              <a:t>3.3–3.6×</a:t>
             </a:r>
             <a:endParaRPr lang="en-US" sz="4000" dirty="0"/>
           </a:p>
@@ -6609,7 +7587,7 @@
       </p:sp>
       <p:sp>
         <p:nvSpPr>
-          <p:cNvPr id="14" name="Scenarios label"/>
+          <p:cNvPr id="14" name="Measured label"/>
           <p:cNvSpPr txBox="1"/>
           <p:nvPr/>
         </p:nvSpPr>
@@ -6637,7 +7615,7 @@
                   <a:schemeClr val="tx2"/>
                 </a:solidFill>
               </a:rPr>
-              <a:t>one-click scenarios: page fault, TLB hit, large page</a:t>
+              <a:t>slower per read when every read needs a page walk, measured on our laptop</a:t>
             </a:r>
             <a:endParaRPr lang="en-US" sz="1400" dirty="0"/>
           </a:p>
@@ -9353,7 +10331,7 @@
                   <a:schemeClr val="accent1"/>
                 </a:solidFill>
               </a:rPr>
-              <a:t>THE LIVE TREE</a:t>
+              <a:t>HARDWARE · INSIDE A VIRTUAL MACHINE</a:t>
             </a:r>
             <a:endParaRPr lang="en-US" sz="1300" dirty="0"/>
           </a:p>
@@ -9394,7 +10372,7 @@
                 <a:ea typeface="Cambria" pitchFamily="34" charset="-122"/>
                 <a:cs typeface="Cambria" pitchFamily="34" charset="-120"/>
               </a:rPr>
-              <a:t>Page tables exist only where memory is used</a:t>
+              <a:t>Inside a virtual machine, 4 reads become 24</a:t>
             </a:r>
             <a:endParaRPr lang="en-US" sz="3200" dirty="0"/>
           </a:p>
@@ -9402,7 +10380,7 @@
       </p:sp>
       <p:pic>
         <p:nvPicPr>
-          <p:cNvPr id="4" name="tree.png" descr="The process's page-table tree after a few scenarios">    </p:cNvPr>
+          <p:cNvPr id="4" name="vm_first.png" descr="Walk inside a virtual machine: a 5 by 5 grid of 24 numbered reads">    </p:cNvPr>
           <p:cNvPicPr>
             <a:picLocks noChangeAspect="1"/>
           </p:cNvPicPr>
@@ -9417,7 +10395,7 @@
         <p:spPr>
           <a:xfrm>
             <a:off x="548640" y="1645920"/>
-            <a:ext cx="7863840" cy="4262148"/>
+            <a:ext cx="7589520" cy="4259341"/>
           </a:xfrm>
           <a:prstGeom prst="rect">
             <a:avLst/>
@@ -9433,14 +10411,14 @@
       </p:pic>
       <p:sp>
         <p:nvSpPr>
-          <p:cNvPr id="5" name="Tables value"/>
+          <p:cNvPr id="5" name="Per level value"/>
           <p:cNvSpPr txBox="1"/>
           <p:nvPr/>
         </p:nvSpPr>
         <p:spPr>
           <a:xfrm>
-            <a:off x="8915400" y="1828800"/>
-            <a:ext cx="2743200" cy="685800"/>
+            <a:off x="8686800" y="1783080"/>
+            <a:ext cx="2926080" cy="685800"/>
           </a:xfrm>
           <a:prstGeom prst="rect">
             <a:avLst/>
@@ -9458,13 +10436,13 @@
             <a:r>
               <a:rPr lang="en-US" sz="4000" b="1" dirty="0">
                 <a:solidFill>
-                  <a:schemeClr val="accent2"/>
+                  <a:schemeClr val="accent6"/>
                 </a:solidFill>
                 <a:latin typeface="Cambria" pitchFamily="34" charset="0"/>
                 <a:ea typeface="Cambria" pitchFamily="34" charset="-122"/>
                 <a:cs typeface="Cambria" pitchFamily="34" charset="-120"/>
               </a:rPr>
-              <a:t>8 tables</a:t>
+              <a:t>4 + 1</a:t>
             </a:r>
             <a:endParaRPr lang="en-US" sz="4000" dirty="0"/>
           </a:p>
@@ -9472,14 +10450,14 @@
       </p:sp>
       <p:sp>
         <p:nvSpPr>
-          <p:cNvPr id="6" name="Tables label"/>
+          <p:cNvPr id="6" name="Per level label"/>
           <p:cNvSpPr txBox="1"/>
           <p:nvPr/>
         </p:nvSpPr>
         <p:spPr>
           <a:xfrm>
-            <a:off x="8915400" y="2542032"/>
-            <a:ext cx="2743200" cy="548640"/>
+            <a:off x="8686800" y="2496312"/>
+            <a:ext cx="2926080" cy="548640"/>
           </a:xfrm>
           <a:prstGeom prst="rect">
             <a:avLst/>
@@ -9500,7 +10478,7 @@
                   <a:schemeClr val="tx2"/>
                 </a:solidFill>
               </a:rPr>
-              <a:t>Level 4 to Level 1, built on demand</a:t>
+              <a:t>per guest table: the host walks its 4 levels, then the entry is read</a:t>
             </a:r>
             <a:endParaRPr lang="en-US" sz="1400" dirty="0"/>
           </a:p>
@@ -9508,14 +10486,14 @@
       </p:sp>
       <p:sp>
         <p:nvSpPr>
-          <p:cNvPr id="7" name="Used value"/>
+          <p:cNvPr id="7" name="Total value"/>
           <p:cNvSpPr txBox="1"/>
           <p:nvPr/>
         </p:nvSpPr>
         <p:spPr>
           <a:xfrm>
-            <a:off x="8915400" y="3291840"/>
-            <a:ext cx="2743200" cy="685800"/>
+            <a:off x="8686800" y="3246120"/>
+            <a:ext cx="2926080" cy="685800"/>
           </a:xfrm>
           <a:prstGeom prst="rect">
             <a:avLst/>
@@ -9533,13 +10511,13 @@
             <a:r>
               <a:rPr lang="en-US" sz="4000" b="1" dirty="0">
                 <a:solidFill>
-                  <a:schemeClr val="accent3"/>
+                  <a:schemeClr val="accent1"/>
                 </a:solidFill>
                 <a:latin typeface="Cambria" pitchFamily="34" charset="0"/>
                 <a:ea typeface="Cambria" pitchFamily="34" charset="-122"/>
                 <a:cs typeface="Cambria" pitchFamily="34" charset="-120"/>
               </a:rPr>
-              <a:t>32 KB</a:t>
+              <a:t>24 reads</a:t>
             </a:r>
             <a:endParaRPr lang="en-US" sz="4000" dirty="0"/>
           </a:p>
@@ -9547,14 +10525,14 @@
       </p:sp>
       <p:sp>
         <p:nvSpPr>
-          <p:cNvPr id="8" name="Used label"/>
+          <p:cNvPr id="8" name="Total label"/>
           <p:cNvSpPr txBox="1"/>
           <p:nvPr/>
         </p:nvSpPr>
         <p:spPr>
           <a:xfrm>
-            <a:off x="8915400" y="4005072"/>
-            <a:ext cx="2743200" cy="548640"/>
+            <a:off x="8686800" y="3959352"/>
+            <a:ext cx="2926080" cy="548640"/>
           </a:xfrm>
           <a:prstGeom prst="rect">
             <a:avLst/>
@@ -9575,7 +10553,7 @@
                   <a:schemeClr val="tx2"/>
                 </a:solidFill>
               </a:rPr>
-              <a:t>of page-table memory for this process</a:t>
+              <a:t>for one address with nothing cached, against 4 on bare hardware</a:t>
             </a:r>
             <a:endParaRPr lang="en-US" sz="1400" dirty="0"/>
           </a:p>
@@ -9583,14 +10561,14 @@
       </p:sp>
       <p:sp>
         <p:nvSpPr>
-          <p:cNvPr id="9" name="Flat value"/>
+          <p:cNvPr id="9" name="VM note"/>
           <p:cNvSpPr txBox="1"/>
           <p:nvPr/>
         </p:nvSpPr>
         <p:spPr>
           <a:xfrm>
-            <a:off x="8915400" y="4754880"/>
-            <a:ext cx="2743200" cy="685800"/>
+            <a:off x="8686800" y="4846320"/>
+            <a:ext cx="2926080" cy="1097280"/>
           </a:xfrm>
           <a:prstGeom prst="rect">
             <a:avLst/>
@@ -9599,58 +10577,19 @@
           <a:ln/>
         </p:spPr>
         <p:txBody>
-          <a:bodyPr wrap="square" lIns="0" tIns="0" rIns="0" bIns="0" rtlCol="0" anchor="ctr"/>
+          <a:bodyPr wrap="square" lIns="0" tIns="0" rIns="0" bIns="0" rtlCol="0" anchor="t"/>
           <a:lstStyle/>
           <a:p>
             <a:pPr indent="0" marL="0">
               <a:buNone/>
             </a:pPr>
             <a:r>
-              <a:rPr lang="en-US" sz="4000" b="1" dirty="0">
-                <a:solidFill>
-                  <a:schemeClr val="accent1"/>
-                </a:solidFill>
-                <a:latin typeface="Cambria" pitchFamily="34" charset="0"/>
-                <a:ea typeface="Cambria" pitchFamily="34" charset="-122"/>
-                <a:cs typeface="Cambria" pitchFamily="34" charset="-120"/>
-              </a:rPr>
-              <a:t>512 GB</a:t>
-            </a:r>
-            <a:endParaRPr lang="en-US" sz="4000" dirty="0"/>
-          </a:p>
-        </p:txBody>
-      </p:sp>
-      <p:sp>
-        <p:nvSpPr>
-          <p:cNvPr id="10" name="Flat label"/>
-          <p:cNvSpPr txBox="1"/>
-          <p:nvPr/>
-        </p:nvSpPr>
-        <p:spPr>
-          <a:xfrm>
-            <a:off x="8915400" y="5468112"/>
-            <a:ext cx="2743200" cy="548640"/>
-          </a:xfrm>
-          <a:prstGeom prst="rect">
-            <a:avLst/>
-          </a:prstGeom>
-          <a:noFill/>
-          <a:ln/>
-        </p:spPr>
-        <p:txBody>
-          <a:bodyPr wrap="square" lIns="0" tIns="0" rIns="0" bIns="0" rtlCol="0" anchor="t"/>
-          <a:lstStyle/>
-          <a:p>
-            <a:pPr indent="0" marL="0">
-              <a:buNone/>
-            </a:pPr>
-            <a:r>
               <a:rPr lang="en-US" sz="1400" dirty="0">
                 <a:solidFill>
                   <a:schemeClr val="tx2"/>
                 </a:solidFill>
               </a:rPr>
-              <a:t>for a single flat table over the same address space</a:t>
+              <a:t>Why Hyper-V and cloud servers lean even harder on large pages and walk caches.</a:t>
             </a:r>
             <a:endParaRPr lang="en-US" sz="1400" dirty="0"/>
           </a:p>
@@ -9758,7 +10697,7 @@
                   <a:schemeClr val="accent1"/>
                 </a:solidFill>
               </a:rPr>
-              <a:t>HARDWARE SWITCHES</a:t>
+              <a:t>THE LIVE TREE</a:t>
             </a:r>
             <a:endParaRPr lang="en-US" sz="1300" dirty="0"/>
           </a:p>
@@ -9799,46 +10738,30 @@
                 <a:ea typeface="Cambria" pitchFamily="34" charset="-122"/>
                 <a:cs typeface="Cambria" pitchFamily="34" charset="-120"/>
               </a:rPr>
-              <a:t>The walk cache cuts page-table reads by 4x</a:t>
+              <a:t>Page tables exist only where memory is used</a:t>
             </a:r>
             <a:endParaRPr lang="en-US" sz="3200" dirty="0"/>
           </a:p>
         </p:txBody>
       </p:sp>
-      <p:graphicFrame>
-        <p:nvGraphicFramePr>
-          <p:cNvPr id="4" name="Reads chart" descr=""/>
-          <p:cNvGraphicFramePr/>
-          <p:nvPr/>
-        </p:nvGraphicFramePr>
-        <p:xfrm>
-          <a:off x="548640" y="1645920"/>
-          <a:ext cx="7863840" cy="4480560"/>
-        </p:xfrm>
-        <a:graphic xmlns:a="http://schemas.openxmlformats.org/drawingml/2006/main">
-          <a:graphicData uri="http://schemas.openxmlformats.org/drawingml/2006/chart">
-            <c:chart xmlns:c="http://schemas.openxmlformats.org/drawingml/2006/chart" r:id="rId1"/>
-          </a:graphicData>
-        </a:graphic>
-      </p:graphicFrame>
       <p:pic>
         <p:nvPicPr>
-          <p:cNvPr id="5" name="Hardware menu" descr="The Hardware menu with the switches">    </p:cNvPr>
+          <p:cNvPr id="4" name="tree.png" descr="The process's page-table tree after a few scenarios">    </p:cNvPr>
           <p:cNvPicPr>
             <a:picLocks noChangeAspect="1"/>
           </p:cNvPicPr>
           <p:nvPr/>
         </p:nvPicPr>
         <p:blipFill>
-          <a:blip r:embed="rId2"/>
+          <a:blip r:embed="rId1"/>
           <a:stretch>
             <a:fillRect/>
           </a:stretch>
         </p:blipFill>
         <p:spPr>
           <a:xfrm>
-            <a:off x="9052560" y="1737360"/>
-            <a:ext cx="2194560" cy="2411604"/>
+            <a:off x="548640" y="1645920"/>
+            <a:ext cx="7863840" cy="4262148"/>
           </a:xfrm>
           <a:prstGeom prst="rect">
             <a:avLst/>
@@ -9854,14 +10777,14 @@
       </p:pic>
       <p:sp>
         <p:nvSpPr>
-          <p:cNvPr id="6" name="Chart note"/>
+          <p:cNvPr id="5" name="Tables value"/>
           <p:cNvSpPr txBox="1"/>
           <p:nvPr/>
         </p:nvSpPr>
         <p:spPr>
           <a:xfrm>
-            <a:off x="8915400" y="4434840"/>
-            <a:ext cx="2697480" cy="1463040"/>
+            <a:off x="8915400" y="1828800"/>
+            <a:ext cx="2743200" cy="685800"/>
           </a:xfrm>
           <a:prstGeom prst="rect">
             <a:avLst/>
@@ -9870,6 +10793,45 @@
           <a:ln/>
         </p:spPr>
         <p:txBody>
+          <a:bodyPr wrap="square" lIns="0" tIns="0" rIns="0" bIns="0" rtlCol="0" anchor="ctr"/>
+          <a:lstStyle/>
+          <a:p>
+            <a:pPr indent="0" marL="0">
+              <a:buNone/>
+            </a:pPr>
+            <a:r>
+              <a:rPr lang="en-US" sz="4000" b="1" dirty="0">
+                <a:solidFill>
+                  <a:schemeClr val="accent2"/>
+                </a:solidFill>
+                <a:latin typeface="Cambria" pitchFamily="34" charset="0"/>
+                <a:ea typeface="Cambria" pitchFamily="34" charset="-122"/>
+                <a:cs typeface="Cambria" pitchFamily="34" charset="-120"/>
+              </a:rPr>
+              <a:t>8 tables</a:t>
+            </a:r>
+            <a:endParaRPr lang="en-US" sz="4000" dirty="0"/>
+          </a:p>
+        </p:txBody>
+      </p:sp>
+      <p:sp>
+        <p:nvSpPr>
+          <p:cNvPr id="6" name="Tables label"/>
+          <p:cNvSpPr txBox="1"/>
+          <p:nvPr/>
+        </p:nvSpPr>
+        <p:spPr>
+          <a:xfrm>
+            <a:off x="8915400" y="2542032"/>
+            <a:ext cx="2743200" cy="548640"/>
+          </a:xfrm>
+          <a:prstGeom prst="rect">
+            <a:avLst/>
+          </a:prstGeom>
+          <a:noFill/>
+          <a:ln/>
+        </p:spPr>
+        <p:txBody>
           <a:bodyPr wrap="square" lIns="0" tIns="0" rIns="0" bIns="0" rtlCol="0" anchor="t"/>
           <a:lstStyle/>
           <a:p>
@@ -9877,14 +10839,164 @@
               <a:buNone/>
             </a:pPr>
             <a:r>
-              <a:rPr lang="en-US" sz="1300" dirty="0">
+              <a:rPr lang="en-US" sz="1400" dirty="0">
                 <a:solidFill>
                   <a:schemeClr val="tx2"/>
                 </a:solidFill>
               </a:rPr>
-              <a:t>192 accesses: 64 heap pages written twice, plus 64 touches of the 4 MB buffer. Model output, not a hardware measurement.</a:t>
-            </a:r>
-            <a:endParaRPr lang="en-US" sz="1300" dirty="0"/>
+              <a:t>Level 4 to Level 1, built on demand</a:t>
+            </a:r>
+            <a:endParaRPr lang="en-US" sz="1400" dirty="0"/>
+          </a:p>
+        </p:txBody>
+      </p:sp>
+      <p:sp>
+        <p:nvSpPr>
+          <p:cNvPr id="7" name="Used value"/>
+          <p:cNvSpPr txBox="1"/>
+          <p:nvPr/>
+        </p:nvSpPr>
+        <p:spPr>
+          <a:xfrm>
+            <a:off x="8915400" y="3291840"/>
+            <a:ext cx="2743200" cy="685800"/>
+          </a:xfrm>
+          <a:prstGeom prst="rect">
+            <a:avLst/>
+          </a:prstGeom>
+          <a:noFill/>
+          <a:ln/>
+        </p:spPr>
+        <p:txBody>
+          <a:bodyPr wrap="square" lIns="0" tIns="0" rIns="0" bIns="0" rtlCol="0" anchor="ctr"/>
+          <a:lstStyle/>
+          <a:p>
+            <a:pPr indent="0" marL="0">
+              <a:buNone/>
+            </a:pPr>
+            <a:r>
+              <a:rPr lang="en-US" sz="4000" b="1" dirty="0">
+                <a:solidFill>
+                  <a:schemeClr val="accent3"/>
+                </a:solidFill>
+                <a:latin typeface="Cambria" pitchFamily="34" charset="0"/>
+                <a:ea typeface="Cambria" pitchFamily="34" charset="-122"/>
+                <a:cs typeface="Cambria" pitchFamily="34" charset="-120"/>
+              </a:rPr>
+              <a:t>32 KB</a:t>
+            </a:r>
+            <a:endParaRPr lang="en-US" sz="4000" dirty="0"/>
+          </a:p>
+        </p:txBody>
+      </p:sp>
+      <p:sp>
+        <p:nvSpPr>
+          <p:cNvPr id="8" name="Used label"/>
+          <p:cNvSpPr txBox="1"/>
+          <p:nvPr/>
+        </p:nvSpPr>
+        <p:spPr>
+          <a:xfrm>
+            <a:off x="8915400" y="4005072"/>
+            <a:ext cx="2743200" cy="548640"/>
+          </a:xfrm>
+          <a:prstGeom prst="rect">
+            <a:avLst/>
+          </a:prstGeom>
+          <a:noFill/>
+          <a:ln/>
+        </p:spPr>
+        <p:txBody>
+          <a:bodyPr wrap="square" lIns="0" tIns="0" rIns="0" bIns="0" rtlCol="0" anchor="t"/>
+          <a:lstStyle/>
+          <a:p>
+            <a:pPr indent="0" marL="0">
+              <a:buNone/>
+            </a:pPr>
+            <a:r>
+              <a:rPr lang="en-US" sz="1400" dirty="0">
+                <a:solidFill>
+                  <a:schemeClr val="tx2"/>
+                </a:solidFill>
+              </a:rPr>
+              <a:t>of page-table memory for this process</a:t>
+            </a:r>
+            <a:endParaRPr lang="en-US" sz="1400" dirty="0"/>
+          </a:p>
+        </p:txBody>
+      </p:sp>
+      <p:sp>
+        <p:nvSpPr>
+          <p:cNvPr id="9" name="Flat value"/>
+          <p:cNvSpPr txBox="1"/>
+          <p:nvPr/>
+        </p:nvSpPr>
+        <p:spPr>
+          <a:xfrm>
+            <a:off x="8915400" y="4754880"/>
+            <a:ext cx="2743200" cy="685800"/>
+          </a:xfrm>
+          <a:prstGeom prst="rect">
+            <a:avLst/>
+          </a:prstGeom>
+          <a:noFill/>
+          <a:ln/>
+        </p:spPr>
+        <p:txBody>
+          <a:bodyPr wrap="square" lIns="0" tIns="0" rIns="0" bIns="0" rtlCol="0" anchor="ctr"/>
+          <a:lstStyle/>
+          <a:p>
+            <a:pPr indent="0" marL="0">
+              <a:buNone/>
+            </a:pPr>
+            <a:r>
+              <a:rPr lang="en-US" sz="4000" b="1" dirty="0">
+                <a:solidFill>
+                  <a:schemeClr val="accent1"/>
+                </a:solidFill>
+                <a:latin typeface="Cambria" pitchFamily="34" charset="0"/>
+                <a:ea typeface="Cambria" pitchFamily="34" charset="-122"/>
+                <a:cs typeface="Cambria" pitchFamily="34" charset="-120"/>
+              </a:rPr>
+              <a:t>512 GB</a:t>
+            </a:r>
+            <a:endParaRPr lang="en-US" sz="4000" dirty="0"/>
+          </a:p>
+        </p:txBody>
+      </p:sp>
+      <p:sp>
+        <p:nvSpPr>
+          <p:cNvPr id="10" name="Flat label"/>
+          <p:cNvSpPr txBox="1"/>
+          <p:nvPr/>
+        </p:nvSpPr>
+        <p:spPr>
+          <a:xfrm>
+            <a:off x="8915400" y="5468112"/>
+            <a:ext cx="2743200" cy="548640"/>
+          </a:xfrm>
+          <a:prstGeom prst="rect">
+            <a:avLst/>
+          </a:prstGeom>
+          <a:noFill/>
+          <a:ln/>
+        </p:spPr>
+        <p:txBody>
+          <a:bodyPr wrap="square" lIns="0" tIns="0" rIns="0" bIns="0" rtlCol="0" anchor="t"/>
+          <a:lstStyle/>
+          <a:p>
+            <a:pPr indent="0" marL="0">
+              <a:buNone/>
+            </a:pPr>
+            <a:r>
+              <a:rPr lang="en-US" sz="1400" dirty="0">
+                <a:solidFill>
+                  <a:schemeClr val="tx2"/>
+                </a:solidFill>
+              </a:rPr>
+              <a:t>for a single flat table over the same address space</a:t>
+            </a:r>
+            <a:endParaRPr lang="en-US" sz="1400" dirty="0"/>
           </a:p>
         </p:txBody>
       </p:sp>

--- a/deliverables/review3_changes.pptx
+++ b/deliverables/review3_changes.pptx
@@ -120,19 +120,19 @@
   <p:extLst>
     <p:ext uri="{521415D9-36F7-43E2-AB2F-B90AF26B5E84}">
       <p14:sectionLst xmlns:p14="http://schemas.microsoft.com/office/powerpoint/2010/main">
-        <p14:section name="Opening" id="{05b8fad7-a341-303e-058e-6843178fd647}">
+        <p14:section name="Opening" id="{cfa7763f-204b-71a0-45d2-d0f8053d3ed7}">
           <p14:sldIdLst>
             <p14:sldId id="256"/>
           </p14:sldIdLst>
         </p14:section>
-        <p14:section name="What we added" id="{580237b9-4be9-0c85-c185-5d945580eb96}">
+        <p14:section name="What we added" id="{0365839e-625d-bbd2-7939-3c2865fb18b7}">
           <p14:sldIdLst>
             <p14:sldId id="257"/>
             <p14:sldId id="258"/>
             <p14:sldId id="259"/>
           </p14:sldIdLst>
         </p14:section>
-        <p14:section name="The demo" id="{0d61c4a9-7b54-7efd-3b03-ed089c7d9ee2}">
+        <p14:section name="The demo" id="{d816c4e1-9baf-04a7-b96d-0634f1758bb3}">
           <p14:sldIdLst>
             <p14:sldId id="260"/>
             <p14:sldId id="261"/>
@@ -144,7 +144,7 @@
             <p14:sldId id="267"/>
           </p14:sldIdLst>
         </p14:section>
-        <p14:section name="Changes and next" id="{1cff947c-c767-cd7d-cc4f-f3be857eabea}">
+        <p14:section name="Changes and next" id="{efa65d35-78ae-91dc-6555-c5956e0f613b}">
           <p14:sldIdLst>
             <p14:sldId id="268"/>
             <p14:sldId id="269"/>
@@ -10761,7 +10761,7 @@
         <p:spPr>
           <a:xfrm>
             <a:off x="548640" y="1645920"/>
-            <a:ext cx="7863840" cy="4262148"/>
+            <a:ext cx="7854809" cy="4480560"/>
           </a:xfrm>
           <a:prstGeom prst="rect">
             <a:avLst/>
@@ -10844,7 +10844,7 @@
                   <a:schemeClr val="tx2"/>
                 </a:solidFill>
               </a:rPr>
-              <a:t>Level 4 to Level 1, built on demand</a:t>
+              <a:t>Level 4 to Level 1, built on demand; the walk ends at a physical address</a:t>
             </a:r>
             <a:endParaRPr lang="en-US" sz="1400" dirty="0"/>
           </a:p>
